--- a/curso/pptx/S30.pptx
+++ b/curso/pptx/S30.pptx
@@ -3819,8 +3819,8 @@
         </p:nvSpPr>
         <p:spPr>
           <a:xfrm>
-            <a:off x="640000" y="420000"/>
-            <a:ext cx="10912000" cy="420000"/>
+            <a:off x="10652000" y="380000"/>
+            <a:ext cx="900000" cy="800000"/>
           </a:xfrm>
           <a:prstGeom prst="rect">
             <a:avLst/>
@@ -3835,17 +3835,17 @@
           <a:p>
             <a:pPr>
               <a:spcAft>
-                <a:spcPts val="810"/>
+                <a:spcPts val="1980"/>
               </a:spcAft>
             </a:pPr>
             <a:r>
-              <a:rPr sz="1800" b="1">
+              <a:rPr sz="4400" b="0">
                 <a:solidFill>
                   <a:srgbClr val="1F2A44"/>
                 </a:solidFill>
                 <a:latin typeface="Nunito Sans"/>
               </a:rPr>
-              <a:t>🦉 Aula de Filosofía</a:t>
+              <a:t>🙃</a:t>
             </a:r>
           </a:p>
         </p:txBody>

--- a/curso/pptx/S30.pptx
+++ b/curso/pptx/S30.pptx
@@ -470,356 +470,6 @@
     </a:lvl9pPr>
   </p:notesStyle>
 </p:notesMaster>
-</file>
-
-<file path=ppt/notesSlides/notesSlide1.xml><?xml version="1.0" encoding="utf-8"?>
-<p:notes xmlns:a="http://schemas.openxmlformats.org/drawingml/2006/main" xmlns:p="http://schemas.openxmlformats.org/presentationml/2006/main" xmlns:r="http://schemas.openxmlformats.org/officeDocument/2006/relationships">
-  <p:cSld>
-    <p:spTree>
-      <p:nvGrpSpPr>
-        <p:cNvPr id="1" name=""/>
-        <p:cNvGrpSpPr/>
-        <p:nvPr/>
-      </p:nvGrpSpPr>
-      <p:grpSpPr>
-        <a:xfrm>
-          <a:off x="0" y="0"/>
-          <a:ext cx="0" cy="0"/>
-          <a:chOff x="0" y="0"/>
-          <a:chExt cx="0" cy="0"/>
-        </a:xfrm>
-      </p:grpSpPr>
-      <p:sp>
-        <p:nvSpPr>
-          <p:cNvPr id="2" name="Slide Image Placeholder 1"/>
-          <p:cNvSpPr>
-            <a:spLocks noGrp="1"/>
-          </p:cNvSpPr>
-          <p:nvPr>
-            <p:ph type="sldImg" idx="2"/>
-          </p:nvPr>
-        </p:nvSpPr>
-        <p:spPr/>
-      </p:sp>
-      <p:sp>
-        <p:nvSpPr>
-          <p:cNvPr id="3" name="Notes Placeholder 2"/>
-          <p:cNvSpPr>
-            <a:spLocks noGrp="1"/>
-          </p:cNvSpPr>
-          <p:nvPr>
-            <p:ph type="body" idx="3" sz="quarter"/>
-          </p:nvPr>
-        </p:nvSpPr>
-        <p:spPr/>
-        <p:txBody>
-          <a:bodyPr/>
-          <a:lstStyle/>
-          <a:p>
-            <a:r>
-              <a:t>3 minutos. Sin apuntes. Es para recordar, no cuenta para nota.</a:t>
-            </a:r>
-          </a:p>
-        </p:txBody>
-      </p:sp>
-      <p:sp>
-        <p:nvSpPr>
-          <p:cNvPr id="4" name="Slide Number Placeholder 3"/>
-          <p:cNvSpPr>
-            <a:spLocks noGrp="1"/>
-          </p:cNvSpPr>
-          <p:nvPr>
-            <p:ph type="sldNum" idx="5" sz="quarter"/>
-          </p:nvPr>
-        </p:nvSpPr>
-        <p:spPr/>
-      </p:sp>
-    </p:spTree>
-  </p:cSld>
-  <p:clrMapOvr>
-    <a:masterClrMapping/>
-  </p:clrMapOvr>
-</p:notes>
-</file>
-
-<file path=ppt/notesSlides/notesSlide2.xml><?xml version="1.0" encoding="utf-8"?>
-<p:notes xmlns:a="http://schemas.openxmlformats.org/drawingml/2006/main" xmlns:p="http://schemas.openxmlformats.org/presentationml/2006/main" xmlns:r="http://schemas.openxmlformats.org/officeDocument/2006/relationships">
-  <p:cSld>
-    <p:spTree>
-      <p:nvGrpSpPr>
-        <p:cNvPr id="1" name=""/>
-        <p:cNvGrpSpPr/>
-        <p:nvPr/>
-      </p:nvGrpSpPr>
-      <p:grpSpPr>
-        <a:xfrm>
-          <a:off x="0" y="0"/>
-          <a:ext cx="0" cy="0"/>
-          <a:chOff x="0" y="0"/>
-          <a:chExt cx="0" cy="0"/>
-        </a:xfrm>
-      </p:grpSpPr>
-      <p:sp>
-        <p:nvSpPr>
-          <p:cNvPr id="2" name="Slide Image Placeholder 1"/>
-          <p:cNvSpPr>
-            <a:spLocks noGrp="1"/>
-          </p:cNvSpPr>
-          <p:nvPr>
-            <p:ph type="sldImg" idx="2"/>
-          </p:nvPr>
-        </p:nvSpPr>
-        <p:spPr/>
-      </p:sp>
-      <p:sp>
-        <p:nvSpPr>
-          <p:cNvPr id="3" name="Notes Placeholder 2"/>
-          <p:cNvSpPr>
-            <a:spLocks noGrp="1"/>
-          </p:cNvSpPr>
-          <p:nvPr>
-            <p:ph type="body" idx="3" sz="quarter"/>
-          </p:nvPr>
-        </p:nvSpPr>
-        <p:spPr/>
-        <p:txBody>
-          <a:bodyPr/>
-          <a:lstStyle/>
-          <a:p>
-            <a:r>
-              <a:t>3 minutos. Sin apuntes. Es para recordar, no cuenta para nota.</a:t>
-            </a:r>
-          </a:p>
-        </p:txBody>
-      </p:sp>
-      <p:sp>
-        <p:nvSpPr>
-          <p:cNvPr id="4" name="Slide Number Placeholder 3"/>
-          <p:cNvSpPr>
-            <a:spLocks noGrp="1"/>
-          </p:cNvSpPr>
-          <p:nvPr>
-            <p:ph type="sldNum" idx="5" sz="quarter"/>
-          </p:nvPr>
-        </p:nvSpPr>
-        <p:spPr/>
-      </p:sp>
-    </p:spTree>
-  </p:cSld>
-  <p:clrMapOvr>
-    <a:masterClrMapping/>
-  </p:clrMapOvr>
-</p:notes>
-</file>
-
-<file path=ppt/notesSlides/notesSlide3.xml><?xml version="1.0" encoding="utf-8"?>
-<p:notes xmlns:a="http://schemas.openxmlformats.org/drawingml/2006/main" xmlns:p="http://schemas.openxmlformats.org/presentationml/2006/main" xmlns:r="http://schemas.openxmlformats.org/officeDocument/2006/relationships">
-  <p:cSld>
-    <p:spTree>
-      <p:nvGrpSpPr>
-        <p:cNvPr id="1" name=""/>
-        <p:cNvGrpSpPr/>
-        <p:nvPr/>
-      </p:nvGrpSpPr>
-      <p:grpSpPr>
-        <a:xfrm>
-          <a:off x="0" y="0"/>
-          <a:ext cx="0" cy="0"/>
-          <a:chOff x="0" y="0"/>
-          <a:chExt cx="0" cy="0"/>
-        </a:xfrm>
-      </p:grpSpPr>
-      <p:sp>
-        <p:nvSpPr>
-          <p:cNvPr id="2" name="Slide Image Placeholder 1"/>
-          <p:cNvSpPr>
-            <a:spLocks noGrp="1"/>
-          </p:cNvSpPr>
-          <p:nvPr>
-            <p:ph type="sldImg" idx="2"/>
-          </p:nvPr>
-        </p:nvSpPr>
-        <p:spPr/>
-      </p:sp>
-      <p:sp>
-        <p:nvSpPr>
-          <p:cNvPr id="3" name="Notes Placeholder 2"/>
-          <p:cNvSpPr>
-            <a:spLocks noGrp="1"/>
-          </p:cNvSpPr>
-          <p:nvPr>
-            <p:ph type="body" idx="3" sz="quarter"/>
-          </p:nvPr>
-        </p:nvSpPr>
-        <p:spPr/>
-        <p:txBody>
-          <a:bodyPr/>
-          <a:lstStyle/>
-          <a:p>
-            <a:r>
-              <a:t>Nadie tiene que contestar: solo pensarlo.</a:t>
-            </a:r>
-          </a:p>
-        </p:txBody>
-      </p:sp>
-      <p:sp>
-        <p:nvSpPr>
-          <p:cNvPr id="4" name="Slide Number Placeholder 3"/>
-          <p:cNvSpPr>
-            <a:spLocks noGrp="1"/>
-          </p:cNvSpPr>
-          <p:nvPr>
-            <p:ph type="sldNum" idx="5" sz="quarter"/>
-          </p:nvPr>
-        </p:nvSpPr>
-        <p:spPr/>
-      </p:sp>
-    </p:spTree>
-  </p:cSld>
-  <p:clrMapOvr>
-    <a:masterClrMapping/>
-  </p:clrMapOvr>
-</p:notes>
-</file>
-
-<file path=ppt/notesSlides/notesSlide4.xml><?xml version="1.0" encoding="utf-8"?>
-<p:notes xmlns:a="http://schemas.openxmlformats.org/drawingml/2006/main" xmlns:p="http://schemas.openxmlformats.org/presentationml/2006/main" xmlns:r="http://schemas.openxmlformats.org/officeDocument/2006/relationships">
-  <p:cSld>
-    <p:spTree>
-      <p:nvGrpSpPr>
-        <p:cNvPr id="1" name=""/>
-        <p:cNvGrpSpPr/>
-        <p:nvPr/>
-      </p:nvGrpSpPr>
-      <p:grpSpPr>
-        <a:xfrm>
-          <a:off x="0" y="0"/>
-          <a:ext cx="0" cy="0"/>
-          <a:chOff x="0" y="0"/>
-          <a:chExt cx="0" cy="0"/>
-        </a:xfrm>
-      </p:grpSpPr>
-      <p:sp>
-        <p:nvSpPr>
-          <p:cNvPr id="2" name="Slide Image Placeholder 1"/>
-          <p:cNvSpPr>
-            <a:spLocks noGrp="1"/>
-          </p:cNvSpPr>
-          <p:nvPr>
-            <p:ph type="sldImg" idx="2"/>
-          </p:nvPr>
-        </p:nvSpPr>
-        <p:spPr/>
-      </p:sp>
-      <p:sp>
-        <p:nvSpPr>
-          <p:cNvPr id="3" name="Notes Placeholder 2"/>
-          <p:cNvSpPr>
-            <a:spLocks noGrp="1"/>
-          </p:cNvSpPr>
-          <p:nvPr>
-            <p:ph type="body" idx="3" sz="quarter"/>
-          </p:nvPr>
-        </p:nvSpPr>
-        <p:spPr/>
-        <p:txBody>
-          <a:bodyPr/>
-          <a:lstStyle/>
-          <a:p>
-            <a:r>
-              <a:t>Dejar unos segundos para que piensen la respuesta fácil antes de enseñar los pasos.</a:t>
-            </a:r>
-          </a:p>
-        </p:txBody>
-      </p:sp>
-      <p:sp>
-        <p:nvSpPr>
-          <p:cNvPr id="4" name="Slide Number Placeholder 3"/>
-          <p:cNvSpPr>
-            <a:spLocks noGrp="1"/>
-          </p:cNvSpPr>
-          <p:nvPr>
-            <p:ph type="sldNum" idx="5" sz="quarter"/>
-          </p:nvPr>
-        </p:nvSpPr>
-        <p:spPr/>
-      </p:sp>
-    </p:spTree>
-  </p:cSld>
-  <p:clrMapOvr>
-    <a:masterClrMapping/>
-  </p:clrMapOvr>
-</p:notes>
-</file>
-
-<file path=ppt/notesSlides/notesSlide5.xml><?xml version="1.0" encoding="utf-8"?>
-<p:notes xmlns:a="http://schemas.openxmlformats.org/drawingml/2006/main" xmlns:p="http://schemas.openxmlformats.org/presentationml/2006/main" xmlns:r="http://schemas.openxmlformats.org/officeDocument/2006/relationships">
-  <p:cSld>
-    <p:spTree>
-      <p:nvGrpSpPr>
-        <p:cNvPr id="1" name=""/>
-        <p:cNvGrpSpPr/>
-        <p:nvPr/>
-      </p:nvGrpSpPr>
-      <p:grpSpPr>
-        <a:xfrm>
-          <a:off x="0" y="0"/>
-          <a:ext cx="0" cy="0"/>
-          <a:chOff x="0" y="0"/>
-          <a:chExt cx="0" cy="0"/>
-        </a:xfrm>
-      </p:grpSpPr>
-      <p:sp>
-        <p:nvSpPr>
-          <p:cNvPr id="2" name="Slide Image Placeholder 1"/>
-          <p:cNvSpPr>
-            <a:spLocks noGrp="1"/>
-          </p:cNvSpPr>
-          <p:nvPr>
-            <p:ph type="sldImg" idx="2"/>
-          </p:nvPr>
-        </p:nvSpPr>
-        <p:spPr/>
-      </p:sp>
-      <p:sp>
-        <p:nvSpPr>
-          <p:cNvPr id="3" name="Notes Placeholder 2"/>
-          <p:cNvSpPr>
-            <a:spLocks noGrp="1"/>
-          </p:cNvSpPr>
-          <p:nvPr>
-            <p:ph type="body" idx="3" sz="quarter"/>
-          </p:nvPr>
-        </p:nvSpPr>
-        <p:spPr/>
-        <p:txBody>
-          <a:bodyPr/>
-          <a:lstStyle/>
-          <a:p>
-            <a:r>
-              <a:t>Dejar 2 minutos para que lo escriban. La diapositiva siguiente muestra el resumen.</a:t>
-            </a:r>
-          </a:p>
-        </p:txBody>
-      </p:sp>
-      <p:sp>
-        <p:nvSpPr>
-          <p:cNvPr id="4" name="Slide Number Placeholder 3"/>
-          <p:cNvSpPr>
-            <a:spLocks noGrp="1"/>
-          </p:cNvSpPr>
-          <p:nvPr>
-            <p:ph type="sldNum" idx="5" sz="quarter"/>
-          </p:nvPr>
-        </p:nvSpPr>
-        <p:spPr/>
-      </p:sp>
-    </p:spTree>
-  </p:cSld>
-  <p:clrMapOvr>
-    <a:masterClrMapping/>
-  </p:clrMapOvr>
-</p:notes>
 </file>
 
 <file path=ppt/slideLayouts/slideLayout1.xml><?xml version="1.0" encoding="utf-8"?>

--- a/curso/pptx/S30.pptx
+++ b/curso/pptx/S30.pptx
@@ -4186,7 +4186,7 @@
                 </a:solidFill>
                 <a:latin typeface="Nunito Sans"/>
               </a:rPr>
-              <a:t>Anuncio inventado: «El doctor Ramos, famoso en TikTok, recomienda ZenSleep para dormir. ¡Ya lo usan un millón de personas!»</a:t>
+              <a:t>Anuncio inventado: «Un doctor famoso en TikTok recomienda ZenSleep para dormir. ¡Ya lo usan un millón de personas!»</a:t>
             </a:r>
           </a:p>
         </p:txBody>
@@ -4495,7 +4495,7 @@
                 </a:solidFill>
                 <a:latin typeface="Nunito Sans"/>
               </a:rPr>
-              <a:t>Omar: «Sanidad y casi todos los médicos dicen que fumar causa cáncer, y lo repite todo el mundo. ¡Falacia de autoridad y ad populum!».</a:t>
+              <a:t>Un chico: «Sanidad y casi todos los médicos dicen que fumar causa cáncer, y lo repite todo el mundo. ¡Falacia de autoridad y ad populum!».</a:t>
             </a:r>
           </a:p>
         </p:txBody>
@@ -4543,7 +4543,7 @@
                 </a:solidFill>
                 <a:latin typeface="Nunito Sans"/>
               </a:rPr>
-              <a:t>Hay expertos y hay «todo el mundo»… ¿tiene razón Omar?</a:t>
+              <a:t>Hay expertos y hay «todo el mundo»… ¿tiene razón ese chico?</a:t>
             </a:r>
           </a:p>
           <a:p>
@@ -5607,7 +5607,7 @@
                 </a:solidFill>
                 <a:latin typeface="Nunito Sans"/>
               </a:rPr>
-              <a:t>En el experimento de Asch, unas 3 de cada ______ personas siguieron al grupo al menos una vez.  (sesión 29)</a:t>
+              <a:t>En el experimento de las líneas, unas 3 de cada ______ personas siguieron al grupo al menos una vez.  (sesión 29)</a:t>
             </a:r>
           </a:p>
           <a:p>
@@ -5632,7 +5632,7 @@
                 </a:solidFill>
                 <a:latin typeface="Nunito Sans"/>
               </a:rPr>
-              <a:t>En la versión más conocida del experimento de Milgram, el ______ % llegó hasta la descarga más fuerte.  (sesión 29)</a:t>
+              <a:t>En la versión más conocida del experimento de las descargas, el ______ % llegó hasta la descarga más fuerte.  (sesión 29)</a:t>
             </a:r>
           </a:p>
           <a:p>
@@ -5809,7 +5809,7 @@
                 </a:solidFill>
                 <a:latin typeface="Nunito Sans"/>
               </a:rPr>
-              <a:t>En el experimento de Asch, unas 3 de cada </a:t>
+              <a:t>En el experimento de las líneas, unas 3 de cada </a:t>
             </a:r>
             <a:r>
               <a:rPr sz="2600" b="1">
@@ -5852,7 +5852,7 @@
                 </a:solidFill>
                 <a:latin typeface="Nunito Sans"/>
               </a:rPr>
-              <a:t>En la versión más conocida del experimento de Milgram, el </a:t>
+              <a:t>En la versión más conocida del experimento de las descargas, el </a:t>
             </a:r>
             <a:r>
               <a:rPr sz="2600" b="1">
@@ -7197,7 +7197,7 @@
                           </a:solidFill>
                           <a:latin typeface="Nunito Sans"/>
                         </a:rPr>
-                        <a:t>De autoridad (ad verecundiam)</a:t>
+                        <a:t>De autoridad</a:t>
                       </a:r>
                     </a:p>
                   </a:txBody>
@@ -7265,7 +7265,7 @@
                           </a:solidFill>
                           <a:latin typeface="Nunito Sans"/>
                         </a:rPr>
-                        <a:t>De la mayoría (ad populum)</a:t>
+                        <a:t>De la mayoría</a:t>
                       </a:r>
                     </a:p>
                   </a:txBody>

--- a/curso/pptx/S30.pptx
+++ b/curso/pptx/S30.pptx
@@ -20,7 +20,6 @@
     <p:sldId id="268" r:id="rId20"/>
     <p:sldId id="269" r:id="rId21"/>
     <p:sldId id="270" r:id="rId22"/>
-    <p:sldId id="271" r:id="rId23"/>
   </p:sldIdLst>
   <p:sldSz cx="12192000" cy="6858000" type="screen4x3"/>
   <p:notesSz cx="6858000" cy="9144000"/>
@@ -3534,7 +3533,7 @@
                 </a:solidFill>
                 <a:latin typeface="Nunito Sans"/>
               </a:rPr>
-              <a:t>PENSAMIENTO CRÍTICO · SESIÓN 30 · UNIDAD 5 · AUTORIDAD E INFLUENCIA</a:t>
+              <a:t>PENSAMIENTO CRÍTICO · SESIÓN 30 · UNIDAD 5 · FALACIAS II: RAZONAR MAL</a:t>
             </a:r>
           </a:p>
         </p:txBody>
@@ -3612,7 +3611,7 @@
                 </a:solidFill>
                 <a:latin typeface="Nunito Sans"/>
               </a:rPr>
-              <a:t>Repasamos la autoridad por poder y por saber, cuándo fiarse de un experto, las falacias de autoridad y ad populum, y Asch y Milgram.</a:t>
+              <a:t>Repasamos las falacias que razonan mal: generalización apresurada, falso dilema, pendiente resbaladiza, causa falsa, ignorancia y razonamiento circular.</a:t>
             </a:r>
           </a:p>
         </p:txBody>
@@ -3626,6 +3625,110 @@
 </file>
 
 <file path=ppt/slides/slide10.xml><?xml version="1.0" encoding="utf-8"?>
+<p:sld xmlns:a="http://schemas.openxmlformats.org/drawingml/2006/main" xmlns:p="http://schemas.openxmlformats.org/presentationml/2006/main" xmlns:r="http://schemas.openxmlformats.org/officeDocument/2006/relationships">
+  <p:cSld>
+    <p:bg>
+      <p:bgPr>
+        <a:solidFill>
+          <a:srgbClr val="1F2A44"/>
+        </a:solidFill>
+        <a:effectLst/>
+      </p:bgPr>
+    </p:bg>
+    <p:spTree>
+      <p:nvGrpSpPr>
+        <p:cNvPr id="1" name=""/>
+        <p:cNvGrpSpPr/>
+        <p:nvPr/>
+      </p:nvGrpSpPr>
+      <p:grpSpPr/>
+      <p:sp>
+        <p:nvSpPr>
+          <p:cNvPr id="2" name="TextBox 1"/>
+          <p:cNvSpPr txBox="1"/>
+          <p:nvPr/>
+        </p:nvSpPr>
+        <p:spPr>
+          <a:xfrm>
+            <a:off x="640000" y="2300000"/>
+            <a:ext cx="10912000" cy="500000"/>
+          </a:xfrm>
+          <a:prstGeom prst="rect">
+            <a:avLst/>
+          </a:prstGeom>
+          <a:noFill/>
+        </p:spPr>
+        <p:txBody>
+          <a:bodyPr wrap="square">
+            <a:spAutoFit/>
+          </a:bodyPr>
+          <a:lstStyle/>
+          <a:p>
+            <a:pPr>
+              <a:spcAft>
+                <a:spcPts val="810"/>
+              </a:spcAft>
+            </a:pPr>
+            <a:r>
+              <a:rPr sz="1800" b="1">
+                <a:solidFill>
+                  <a:srgbClr val="F4B183"/>
+                </a:solidFill>
+                <a:latin typeface="Nunito Sans"/>
+              </a:rPr>
+              <a:t>BLOQUE 2</a:t>
+            </a:r>
+          </a:p>
+        </p:txBody>
+      </p:sp>
+      <p:sp>
+        <p:nvSpPr>
+          <p:cNvPr id="3" name="TextBox 2"/>
+          <p:cNvSpPr txBox="1"/>
+          <p:nvPr/>
+        </p:nvSpPr>
+        <p:spPr>
+          <a:xfrm>
+            <a:off x="640000" y="2800000"/>
+            <a:ext cx="10912000" cy="800000"/>
+          </a:xfrm>
+          <a:prstGeom prst="rect">
+            <a:avLst/>
+          </a:prstGeom>
+          <a:noFill/>
+        </p:spPr>
+        <p:txBody>
+          <a:bodyPr wrap="square">
+            <a:spAutoFit/>
+          </a:bodyPr>
+          <a:lstStyle/>
+          <a:p>
+            <a:pPr>
+              <a:spcAft>
+                <a:spcPts val="2160"/>
+              </a:spcAft>
+            </a:pPr>
+            <a:r>
+              <a:rPr sz="4800" b="1">
+                <a:solidFill>
+                  <a:srgbClr val="FBF7EF"/>
+                </a:solidFill>
+                <a:latin typeface="Fredoka"/>
+              </a:rPr>
+              <a:t>Caso resuelto</a:t>
+            </a:r>
+          </a:p>
+        </p:txBody>
+      </p:sp>
+    </p:spTree>
+  </p:cSld>
+  <p:clrMapOvr>
+    <a:masterClrMapping/>
+  </p:clrMapOvr>
+</p:sld>
+</file>
+
+<file path=ppt/slides/slide11.xml><?xml version="1.0" encoding="utf-8"?>
 <p:sld xmlns:a="http://schemas.openxmlformats.org/drawingml/2006/main" xmlns:p="http://schemas.openxmlformats.org/presentationml/2006/main" xmlns:r="http://schemas.openxmlformats.org/officeDocument/2006/relationships">
   <p:cSld>
     <p:bg>
@@ -3677,7 +3780,7 @@
                 </a:solidFill>
                 <a:latin typeface="Nunito Sans"/>
               </a:rPr>
-              <a:t>BLOQUE 1 · REPASO DE LA UNIDAD</a:t>
+              <a:t>BLOQUE 2 · CASO RESUELTO</a:t>
             </a:r>
           </a:p>
         </p:txBody>
@@ -3716,7 +3819,7 @@
                 </a:solidFill>
                 <a:latin typeface="Fredoka"/>
               </a:rPr>
-              <a:t>La idea de la unidad</a:t>
+              <a:t>Cuatro trucos en tres frases</a:t>
             </a:r>
           </a:p>
         </p:txBody>
@@ -3729,14 +3832,14 @@
         </p:nvSpPr>
         <p:spPr>
           <a:xfrm>
-            <a:off x="640000" y="1650000"/>
-            <a:ext cx="10912000" cy="1150000"/>
+            <a:off x="640000" y="1600000"/>
+            <a:ext cx="10912000" cy="1100000"/>
           </a:xfrm>
           <a:prstGeom prst="rect">
             <a:avLst/>
           </a:prstGeom>
           <a:solidFill>
-            <a:srgbClr val="EAF0F7"/>
+            <a:srgbClr val="FFFFFF"/>
           </a:solidFill>
           <a:ln>
             <a:noFill/>
@@ -3772,7 +3875,7 @@
         </p:nvSpPr>
         <p:spPr>
           <a:xfrm>
-            <a:off x="840000" y="1730000"/>
+            <a:off x="840000" y="1650000"/>
             <a:ext cx="10512000" cy="1000000"/>
           </a:xfrm>
           <a:prstGeom prst="rect">
@@ -3788,17 +3891,17 @@
           <a:p>
             <a:pPr>
               <a:spcAft>
-                <a:spcPts val="1260"/>
+                <a:spcPts val="1170"/>
               </a:spcAft>
             </a:pPr>
             <a:r>
-              <a:rPr sz="2800" b="1">
+              <a:rPr sz="2600" b="1">
                 <a:solidFill>
                   <a:srgbClr val="1F2A44"/>
                 </a:solidFill>
                 <a:latin typeface="Nunito Sans"/>
               </a:rPr>
-              <a:t>Hacer caso a otros no es malo. Lo malo es hacerlo sin mirar las razones.</a:t>
+              <a:t>«Dos amigos míos dejaron el fútbol y suspendieron. O juegas al fútbol o suspendes. Y nadie ha demostrado lo contrario.»</a:t>
             </a:r>
           </a:p>
         </p:txBody>
@@ -3811,8 +3914,8 @@
         </p:nvSpPr>
         <p:spPr>
           <a:xfrm>
-            <a:off x="640000" y="3000000"/>
-            <a:ext cx="10912000" cy="3458000"/>
+            <a:off x="640000" y="2900000"/>
+            <a:ext cx="10912000" cy="3500000"/>
           </a:xfrm>
           <a:prstGeom prst="rect">
             <a:avLst/>
@@ -3827,76 +3930,101 @@
           <a:p>
             <a:pPr>
               <a:spcAft>
-                <a:spcPts val="1260"/>
+                <a:spcPts val="1080"/>
               </a:spcAft>
             </a:pPr>
             <a:r>
-              <a:rPr sz="2800" b="1">
+              <a:rPr sz="2400" b="1">
                 <a:solidFill>
                   <a:srgbClr val="E8793A"/>
                 </a:solidFill>
                 <a:latin typeface="Nunito Sans"/>
               </a:rPr>
-              <a:t>• </a:t>
-            </a:r>
-            <a:r>
-              <a:rPr sz="2800" b="0">
+              <a:t>1. </a:t>
+            </a:r>
+            <a:r>
+              <a:rPr sz="2400" b="0">
                 <a:solidFill>
                   <a:srgbClr val="1F2A44"/>
                 </a:solidFill>
                 <a:latin typeface="Nunito Sans"/>
               </a:rPr>
-              <a:t>¿Sabe del tema y tiene pruebas?</a:t>
+              <a:t>«Dos amigos… suspendieron»: dos casos para una regla general (generalización) y «después de» tomado como causa (causa falsa).</a:t>
             </a:r>
           </a:p>
           <a:p>
             <a:pPr>
               <a:spcAft>
-                <a:spcPts val="1260"/>
+                <a:spcPts val="1080"/>
               </a:spcAft>
             </a:pPr>
             <a:r>
-              <a:rPr sz="2800" b="1">
+              <a:rPr sz="2400" b="1">
                 <a:solidFill>
                   <a:srgbClr val="E8793A"/>
                 </a:solidFill>
                 <a:latin typeface="Nunito Sans"/>
               </a:rPr>
-              <a:t>• </a:t>
-            </a:r>
-            <a:r>
-              <a:rPr sz="2800" b="0">
+              <a:t>2. </a:t>
+            </a:r>
+            <a:r>
+              <a:rPr sz="2400" b="0">
                 <a:solidFill>
                   <a:srgbClr val="1F2A44"/>
                 </a:solidFill>
                 <a:latin typeface="Nunito Sans"/>
               </a:rPr>
-              <a:t>¿Cuántos lo dicen, y por qué lo dicen?</a:t>
+              <a:t>«O juegas o suspendes»: solo dos opciones. Falso dilema.</a:t>
             </a:r>
           </a:p>
           <a:p>
             <a:pPr>
               <a:spcAft>
-                <a:spcPts val="1260"/>
+                <a:spcPts val="1080"/>
               </a:spcAft>
             </a:pPr>
             <a:r>
-              <a:rPr sz="2800" b="1">
+              <a:rPr sz="2400" b="1">
                 <a:solidFill>
                   <a:srgbClr val="E8793A"/>
                 </a:solidFill>
                 <a:latin typeface="Nunito Sans"/>
               </a:rPr>
-              <a:t>• </a:t>
-            </a:r>
-            <a:r>
-              <a:rPr sz="2800" b="0">
+              <a:t>3. </a:t>
+            </a:r>
+            <a:r>
+              <a:rPr sz="2400" b="0">
                 <a:solidFill>
                   <a:srgbClr val="1F2A44"/>
                 </a:solidFill>
                 <a:latin typeface="Nunito Sans"/>
               </a:rPr>
-              <a:t>¿Obedezco porque tiene razón o por miedo?</a:t>
+              <a:t>«Nadie ha demostrado lo contrario»: apelación a la ignorancia.</a:t>
+            </a:r>
+          </a:p>
+          <a:p>
+            <a:pPr>
+              <a:spcAft>
+                <a:spcPts val="1080"/>
+              </a:spcAft>
+            </a:pPr>
+            <a:r>
+              <a:rPr sz="2400" b="1">
+                <a:solidFill>
+                  <a:srgbClr val="E8793A"/>
+                </a:solidFill>
+                <a:latin typeface="Nunito Sans"/>
+              </a:rPr>
+              <a:t>4. </a:t>
+            </a:r>
+            <a:r>
+              <a:rPr sz="2400" b="0">
+                <a:solidFill>
+                  <a:srgbClr val="1F2A44"/>
+                </a:solidFill>
+                <a:latin typeface="Nunito Sans"/>
+              </a:rPr>
+              <a:t>Conclusión: cuatro falacias y ninguna buena razón para creer que el fútbol hace aprobar.</a:t>
             </a:r>
           </a:p>
         </p:txBody>
@@ -3909,13 +4037,13 @@
 </p:sld>
 </file>
 
-<file path=ppt/slides/slide11.xml><?xml version="1.0" encoding="utf-8"?>
+<file path=ppt/slides/slide12.xml><?xml version="1.0" encoding="utf-8"?>
 <p:sld xmlns:a="http://schemas.openxmlformats.org/drawingml/2006/main" xmlns:p="http://schemas.openxmlformats.org/presentationml/2006/main" xmlns:r="http://schemas.openxmlformats.org/officeDocument/2006/relationships">
   <p:cSld>
     <p:bg>
       <p:bgPr>
         <a:solidFill>
-          <a:srgbClr val="1F2A44"/>
+          <a:srgbClr val="F6C9A8"/>
         </a:solidFill>
         <a:effectLst/>
       </p:bgPr>
@@ -3935,8 +4063,8 @@
         </p:nvSpPr>
         <p:spPr>
           <a:xfrm>
-            <a:off x="640000" y="2300000"/>
-            <a:ext cx="10912000" cy="500000"/>
+            <a:off x="640000" y="380000"/>
+            <a:ext cx="10912000" cy="420000"/>
           </a:xfrm>
           <a:prstGeom prst="rect">
             <a:avLst/>
@@ -3951,17 +4079,17 @@
           <a:p>
             <a:pPr>
               <a:spcAft>
-                <a:spcPts val="810"/>
+                <a:spcPts val="630"/>
               </a:spcAft>
             </a:pPr>
             <a:r>
-              <a:rPr sz="1800" b="1">
-                <a:solidFill>
-                  <a:srgbClr val="F4B183"/>
-                </a:solidFill>
-                <a:latin typeface="Nunito Sans"/>
-              </a:rPr>
-              <a:t>BLOQUE 2</a:t>
+              <a:rPr sz="1400" b="1">
+                <a:solidFill>
+                  <a:srgbClr val="1F2A44"/>
+                </a:solidFill>
+                <a:latin typeface="Nunito Sans"/>
+              </a:rPr>
+              <a:t>CASO TRAMPA · BLOQUE 2 · CASO RESUELTO</a:t>
             </a:r>
           </a:p>
         </p:txBody>
@@ -3974,7 +4102,7 @@
         </p:nvSpPr>
         <p:spPr>
           <a:xfrm>
-            <a:off x="640000" y="2800000"/>
+            <a:off x="640000" y="760000"/>
             <a:ext cx="10912000" cy="800000"/>
           </a:xfrm>
           <a:prstGeom prst="rect">
@@ -3990,17 +4118,247 @@
           <a:p>
             <a:pPr>
               <a:spcAft>
-                <a:spcPts val="2160"/>
+                <a:spcPts val="1710"/>
               </a:spcAft>
             </a:pPr>
             <a:r>
-              <a:rPr sz="4800" b="1">
-                <a:solidFill>
-                  <a:srgbClr val="FBF7EF"/>
+              <a:rPr sz="3800" b="1">
+                <a:solidFill>
+                  <a:srgbClr val="1F2A44"/>
                 </a:solidFill>
                 <a:latin typeface="Fredoka"/>
               </a:rPr>
-              <a:t>Un caso que lo mezcla todo</a:t>
+              <a:t>⚠ Todos los frenos</a:t>
+            </a:r>
+          </a:p>
+        </p:txBody>
+      </p:sp>
+      <p:sp>
+        <p:nvSpPr>
+          <p:cNvPr id="4" name="Rectangle 3"/>
+          <p:cNvSpPr/>
+          <p:nvPr/>
+        </p:nvSpPr>
+        <p:spPr>
+          <a:xfrm>
+            <a:off x="640000" y="1600000"/>
+            <a:ext cx="10912000" cy="1100000"/>
+          </a:xfrm>
+          <a:prstGeom prst="rect">
+            <a:avLst/>
+          </a:prstGeom>
+          <a:solidFill>
+            <a:srgbClr val="FBF7EF"/>
+          </a:solidFill>
+          <a:ln>
+            <a:noFill/>
+          </a:ln>
+        </p:spPr>
+        <p:style>
+          <a:lnRef idx="1">
+            <a:schemeClr val="accent1"/>
+          </a:lnRef>
+          <a:fillRef idx="3">
+            <a:schemeClr val="accent1"/>
+          </a:fillRef>
+          <a:effectRef idx="2">
+            <a:schemeClr val="accent1"/>
+          </a:effectRef>
+          <a:fontRef idx="minor">
+            <a:schemeClr val="lt1"/>
+          </a:fontRef>
+        </p:style>
+        <p:txBody>
+          <a:bodyPr rtlCol="0" anchor="ctr"/>
+          <a:lstStyle/>
+          <a:p>
+            <a:pPr algn="ctr"/>
+          </a:p>
+        </p:txBody>
+      </p:sp>
+      <p:sp>
+        <p:nvSpPr>
+          <p:cNvPr id="5" name="TextBox 4"/>
+          <p:cNvSpPr txBox="1"/>
+          <p:nvPr/>
+        </p:nvSpPr>
+        <p:spPr>
+          <a:xfrm>
+            <a:off x="840000" y="1650000"/>
+            <a:ext cx="10512000" cy="1000000"/>
+          </a:xfrm>
+          <a:prstGeom prst="rect">
+            <a:avLst/>
+          </a:prstGeom>
+          <a:noFill/>
+        </p:spPr>
+        <p:txBody>
+          <a:bodyPr wrap="square" anchor="ctr">
+            <a:spAutoFit/>
+          </a:bodyPr>
+          <a:lstStyle/>
+          <a:p>
+            <a:pPr>
+              <a:spcAft>
+                <a:spcPts val="1170"/>
+              </a:spcAft>
+            </a:pPr>
+            <a:r>
+              <a:rPr sz="2600" b="1">
+                <a:solidFill>
+                  <a:srgbClr val="1F2A44"/>
+                </a:solidFill>
+                <a:latin typeface="Nunito Sans"/>
+              </a:rPr>
+              <a:t>Ejemplo inventado: los técnicos del metro revisan, uno por uno, los frenos de todos los trenes. Ninguno falla. Informe: «Todos los frenos funcionan».</a:t>
+            </a:r>
+          </a:p>
+        </p:txBody>
+      </p:sp>
+      <p:sp>
+        <p:nvSpPr>
+          <p:cNvPr id="6" name="TextBox 5"/>
+          <p:cNvSpPr txBox="1"/>
+          <p:nvPr/>
+        </p:nvSpPr>
+        <p:spPr>
+          <a:xfrm>
+            <a:off x="640000" y="2900000"/>
+            <a:ext cx="10912000" cy="3500000"/>
+          </a:xfrm>
+          <a:prstGeom prst="rect">
+            <a:avLst/>
+          </a:prstGeom>
+          <a:noFill/>
+        </p:spPr>
+        <p:txBody>
+          <a:bodyPr wrap="square">
+            <a:spAutoFit/>
+          </a:bodyPr>
+          <a:lstStyle/>
+          <a:p>
+            <a:pPr>
+              <a:spcAft>
+                <a:spcPts val="1080"/>
+              </a:spcAft>
+            </a:pPr>
+            <a:r>
+              <a:rPr sz="2400" b="1">
+                <a:solidFill>
+                  <a:srgbClr val="E8793A"/>
+                </a:solidFill>
+                <a:latin typeface="Nunito Sans"/>
+              </a:rPr>
+              <a:t>1. </a:t>
+            </a:r>
+            <a:r>
+              <a:rPr sz="2400" b="0">
+                <a:solidFill>
+                  <a:srgbClr val="1F2A44"/>
+                </a:solidFill>
+                <a:latin typeface="Nunito Sans"/>
+              </a:rPr>
+              <a:t>Dice «todos»… ¿generalización apresurada?</a:t>
+            </a:r>
+          </a:p>
+          <a:p>
+            <a:pPr>
+              <a:spcAft>
+                <a:spcPts val="1080"/>
+              </a:spcAft>
+            </a:pPr>
+            <a:r>
+              <a:rPr sz="2400" b="1">
+                <a:solidFill>
+                  <a:srgbClr val="E8793A"/>
+                </a:solidFill>
+                <a:latin typeface="Nunito Sans"/>
+              </a:rPr>
+              <a:t>2. </a:t>
+            </a:r>
+            <a:r>
+              <a:rPr sz="2400" b="0">
+                <a:solidFill>
+                  <a:srgbClr val="1F2A44"/>
+                </a:solidFill>
+                <a:latin typeface="Nunito Sans"/>
+              </a:rPr>
+              <a:t>Dice «todos», y eso suele ser una señal de alarma.</a:t>
+            </a:r>
+          </a:p>
+          <a:p>
+            <a:pPr>
+              <a:spcAft>
+                <a:spcPts val="1080"/>
+              </a:spcAft>
+            </a:pPr>
+            <a:r>
+              <a:rPr sz="2400" b="1">
+                <a:solidFill>
+                  <a:srgbClr val="E8793A"/>
+                </a:solidFill>
+                <a:latin typeface="Nunito Sans"/>
+              </a:rPr>
+              <a:t>3. </a:t>
+            </a:r>
+            <a:r>
+              <a:rPr sz="2400" b="0">
+                <a:solidFill>
+                  <a:srgbClr val="1F2A44"/>
+                </a:solidFill>
+                <a:latin typeface="Nunito Sans"/>
+              </a:rPr>
+              <a:t>Pero han mirado todos los frenos, uno por uno: no queda ninguno sin revisar.</a:t>
+            </a:r>
+          </a:p>
+          <a:p>
+            <a:pPr>
+              <a:spcAft>
+                <a:spcPts val="1080"/>
+              </a:spcAft>
+            </a:pPr>
+            <a:r>
+              <a:rPr sz="2400" b="1">
+                <a:solidFill>
+                  <a:srgbClr val="E8793A"/>
+                </a:solidFill>
+                <a:latin typeface="Nunito Sans"/>
+              </a:rPr>
+              <a:t>4. </a:t>
+            </a:r>
+            <a:r>
+              <a:rPr sz="2400" b="0">
+                <a:solidFill>
+                  <a:srgbClr val="1F2A44"/>
+                </a:solidFill>
+                <a:latin typeface="Nunito Sans"/>
+              </a:rPr>
+              <a:t>La falacia es decir más de lo que muestran los casos. Aquí los casos lo muestran todo.</a:t>
+            </a:r>
+          </a:p>
+          <a:p>
+            <a:pPr>
+              <a:spcAft>
+                <a:spcPts val="1080"/>
+              </a:spcAft>
+            </a:pPr>
+            <a:r>
+              <a:rPr sz="2400" b="1">
+                <a:solidFill>
+                  <a:srgbClr val="E8793A"/>
+                </a:solidFill>
+                <a:latin typeface="Nunito Sans"/>
+              </a:rPr>
+              <a:t>5. </a:t>
+            </a:r>
+            <a:r>
+              <a:rPr sz="2400" b="0">
+                <a:solidFill>
+                  <a:srgbClr val="1F2A44"/>
+                </a:solidFill>
+                <a:latin typeface="Nunito Sans"/>
+              </a:rPr>
+              <a:t>Conclusión: no es falacia. Palabras como «todos» u «o… o…» son pistas, no pruebas: mira las razones.</a:t>
             </a:r>
           </a:p>
         </p:txBody>
@@ -4013,7 +4371,7 @@
 </p:sld>
 </file>
 
-<file path=ppt/slides/slide12.xml><?xml version="1.0" encoding="utf-8"?>
+<file path=ppt/slides/slide13.xml><?xml version="1.0" encoding="utf-8"?>
 <p:sld xmlns:a="http://schemas.openxmlformats.org/drawingml/2006/main" xmlns:p="http://schemas.openxmlformats.org/presentationml/2006/main" xmlns:r="http://schemas.openxmlformats.org/officeDocument/2006/relationships">
   <p:cSld>
     <p:bg>
@@ -4065,7 +4423,7 @@
                 </a:solidFill>
                 <a:latin typeface="Nunito Sans"/>
               </a:rPr>
-              <a:t>BLOQUE 2 · UN CASO QUE LO MEZCLA TODO</a:t>
+              <a:t>LO DE HOY EN TRES LÍNEAS</a:t>
             </a:r>
           </a:p>
         </p:txBody>
@@ -4104,64 +4462,21 @@
                 </a:solidFill>
                 <a:latin typeface="Fredoka"/>
               </a:rPr>
-              <a:t>Caso · El anuncio del doctor</a:t>
-            </a:r>
-          </a:p>
-        </p:txBody>
-      </p:sp>
-      <p:sp>
-        <p:nvSpPr>
-          <p:cNvPr id="4" name="Rectangle 3"/>
-          <p:cNvSpPr/>
-          <p:nvPr/>
-        </p:nvSpPr>
-        <p:spPr>
-          <a:xfrm>
-            <a:off x="640000" y="1600000"/>
-            <a:ext cx="10912000" cy="1100000"/>
-          </a:xfrm>
-          <a:prstGeom prst="rect">
-            <a:avLst/>
-          </a:prstGeom>
-          <a:solidFill>
-            <a:srgbClr val="FFFFFF"/>
-          </a:solidFill>
-          <a:ln>
-            <a:noFill/>
-          </a:ln>
-        </p:spPr>
-        <p:style>
-          <a:lnRef idx="1">
-            <a:schemeClr val="accent1"/>
-          </a:lnRef>
-          <a:fillRef idx="3">
-            <a:schemeClr val="accent1"/>
-          </a:fillRef>
-          <a:effectRef idx="2">
-            <a:schemeClr val="accent1"/>
-          </a:effectRef>
-          <a:fontRef idx="minor">
-            <a:schemeClr val="lt1"/>
-          </a:fontRef>
-        </p:style>
-        <p:txBody>
-          <a:bodyPr rtlCol="0" anchor="ctr"/>
-          <a:lstStyle/>
-          <a:p>
-            <a:pPr algn="ctr"/>
-          </a:p>
-        </p:txBody>
-      </p:sp>
-      <p:sp>
-        <p:nvSpPr>
-          <p:cNvPr id="5" name="TextBox 4"/>
+              <a:t>Escríbelo tú primero, sin mirar</a:t>
+            </a:r>
+          </a:p>
+        </p:txBody>
+      </p:sp>
+      <p:sp>
+        <p:nvSpPr>
+          <p:cNvPr id="4" name="TextBox 3"/>
           <p:cNvSpPr txBox="1"/>
           <p:nvPr/>
         </p:nvSpPr>
         <p:spPr>
           <a:xfrm>
-            <a:off x="840000" y="1650000"/>
-            <a:ext cx="10512000" cy="1000000"/>
+            <a:off x="640000" y="1800000"/>
+            <a:ext cx="10912000" cy="1500000"/>
           </a:xfrm>
           <a:prstGeom prst="rect">
             <a:avLst/>
@@ -4169,7 +4484,7 @@
           <a:noFill/>
         </p:spPr>
         <p:txBody>
-          <a:bodyPr wrap="square" anchor="ctr">
+          <a:bodyPr wrap="square">
             <a:spAutoFit/>
           </a:bodyPr>
           <a:lstStyle/>
@@ -4180,470 +4495,13 @@
               </a:spcAft>
             </a:pPr>
             <a:r>
-              <a:rPr sz="2600" b="1">
-                <a:solidFill>
-                  <a:srgbClr val="1F2A44"/>
-                </a:solidFill>
-                <a:latin typeface="Nunito Sans"/>
-              </a:rPr>
-              <a:t>Anuncio inventado: «Un doctor famoso en TikTok recomienda ZenSleep para dormir. ¡Ya lo usan un millón de personas!»</a:t>
-            </a:r>
-          </a:p>
-        </p:txBody>
-      </p:sp>
-      <p:sp>
-        <p:nvSpPr>
-          <p:cNvPr id="6" name="TextBox 5"/>
-          <p:cNvSpPr txBox="1"/>
-          <p:nvPr/>
-        </p:nvSpPr>
-        <p:spPr>
-          <a:xfrm>
-            <a:off x="640000" y="2900000"/>
-            <a:ext cx="10912000" cy="3500000"/>
-          </a:xfrm>
-          <a:prstGeom prst="rect">
-            <a:avLst/>
-          </a:prstGeom>
-          <a:noFill/>
-        </p:spPr>
-        <p:txBody>
-          <a:bodyPr wrap="square">
-            <a:spAutoFit/>
-          </a:bodyPr>
-          <a:lstStyle/>
-          <a:p>
-            <a:pPr>
-              <a:spcAft>
-                <a:spcPts val="1080"/>
-              </a:spcAft>
-            </a:pPr>
-            <a:r>
-              <a:rPr sz="2400" b="1">
-                <a:solidFill>
-                  <a:srgbClr val="E8793A"/>
-                </a:solidFill>
-                <a:latin typeface="Nunito Sans"/>
-              </a:rPr>
-              <a:t>1. </a:t>
-            </a:r>
-            <a:r>
-              <a:rPr sz="2400" b="0">
-                <a:solidFill>
-                  <a:srgbClr val="1F2A44"/>
-                </a:solidFill>
-                <a:latin typeface="Nunito Sans"/>
-              </a:rPr>
-              <a:t>«Doctor» famoso en TikTok: ¿doctor en qué? ¿Cobra? Creerlo solo por eso sería falacia de autoridad.</a:t>
-            </a:r>
-          </a:p>
-          <a:p>
-            <a:pPr>
-              <a:spcAft>
-                <a:spcPts val="1080"/>
-              </a:spcAft>
-            </a:pPr>
-            <a:r>
-              <a:rPr sz="2400" b="1">
-                <a:solidFill>
-                  <a:srgbClr val="E8793A"/>
-                </a:solidFill>
-                <a:latin typeface="Nunito Sans"/>
-              </a:rPr>
-              <a:t>2. </a:t>
-            </a:r>
-            <a:r>
-              <a:rPr sz="2400" b="0">
-                <a:solidFill>
-                  <a:srgbClr val="1F2A44"/>
-                </a:solidFill>
-                <a:latin typeface="Nunito Sans"/>
-              </a:rPr>
-              <a:t>«Un millón de personas»: usarlo como prueba es ad populum. Comprarlo no es comprobarlo.</a:t>
-            </a:r>
-          </a:p>
-          <a:p>
-            <a:pPr>
-              <a:spcAft>
-                <a:spcPts val="1080"/>
-              </a:spcAft>
-            </a:pPr>
-            <a:r>
-              <a:rPr sz="2400" b="1">
-                <a:solidFill>
-                  <a:srgbClr val="E8793A"/>
-                </a:solidFill>
-                <a:latin typeface="Nunito Sans"/>
-              </a:rPr>
-              <a:t>3. </a:t>
-            </a:r>
-            <a:r>
-              <a:rPr sz="2400" b="0">
-                <a:solidFill>
-                  <a:srgbClr val="1F2A44"/>
-                </a:solidFill>
-                <a:latin typeface="Nunito Sans"/>
-              </a:rPr>
-              <a:t>¿Qué haría falta? Saber qué dicen médicos del sueño que no cobren, y qué estudios hay.</a:t>
-            </a:r>
-          </a:p>
-          <a:p>
-            <a:pPr>
-              <a:spcAft>
-                <a:spcPts val="1080"/>
-              </a:spcAft>
-            </a:pPr>
-            <a:r>
-              <a:rPr sz="2400" b="1">
-                <a:solidFill>
-                  <a:srgbClr val="E8793A"/>
-                </a:solidFill>
-                <a:latin typeface="Nunito Sans"/>
-              </a:rPr>
-              <a:t>4. </a:t>
-            </a:r>
-            <a:r>
-              <a:rPr sz="2400" b="0">
-                <a:solidFill>
-                  <a:srgbClr val="1F2A44"/>
-                </a:solidFill>
-                <a:latin typeface="Nunito Sans"/>
-              </a:rPr>
-              <a:t>Conclusión: dos falacias juntas. No me lo creo hasta ver pruebas.</a:t>
-            </a:r>
-          </a:p>
-        </p:txBody>
-      </p:sp>
-    </p:spTree>
-  </p:cSld>
-  <p:clrMapOvr>
-    <a:masterClrMapping/>
-  </p:clrMapOvr>
-</p:sld>
-</file>
-
-<file path=ppt/slides/slide13.xml><?xml version="1.0" encoding="utf-8"?>
-<p:sld xmlns:a="http://schemas.openxmlformats.org/drawingml/2006/main" xmlns:p="http://schemas.openxmlformats.org/presentationml/2006/main" xmlns:r="http://schemas.openxmlformats.org/officeDocument/2006/relationships">
-  <p:cSld>
-    <p:bg>
-      <p:bgPr>
-        <a:solidFill>
-          <a:srgbClr val="F6C9A8"/>
-        </a:solidFill>
-        <a:effectLst/>
-      </p:bgPr>
-    </p:bg>
-    <p:spTree>
-      <p:nvGrpSpPr>
-        <p:cNvPr id="1" name=""/>
-        <p:cNvGrpSpPr/>
-        <p:nvPr/>
-      </p:nvGrpSpPr>
-      <p:grpSpPr/>
-      <p:sp>
-        <p:nvSpPr>
-          <p:cNvPr id="2" name="TextBox 1"/>
-          <p:cNvSpPr txBox="1"/>
-          <p:nvPr/>
-        </p:nvSpPr>
-        <p:spPr>
-          <a:xfrm>
-            <a:off x="640000" y="380000"/>
-            <a:ext cx="10912000" cy="420000"/>
-          </a:xfrm>
-          <a:prstGeom prst="rect">
-            <a:avLst/>
-          </a:prstGeom>
-          <a:noFill/>
-        </p:spPr>
-        <p:txBody>
-          <a:bodyPr wrap="square">
-            <a:spAutoFit/>
-          </a:bodyPr>
-          <a:lstStyle/>
-          <a:p>
-            <a:pPr>
-              <a:spcAft>
-                <a:spcPts val="630"/>
-              </a:spcAft>
-            </a:pPr>
-            <a:r>
-              <a:rPr sz="1400" b="1">
-                <a:solidFill>
-                  <a:srgbClr val="1F2A44"/>
-                </a:solidFill>
-                <a:latin typeface="Nunito Sans"/>
-              </a:rPr>
-              <a:t>CASO TRAMPA · BLOQUE 2 · UN CASO QUE LO MEZCLA TODO</a:t>
-            </a:r>
-          </a:p>
-        </p:txBody>
-      </p:sp>
-      <p:sp>
-        <p:nvSpPr>
-          <p:cNvPr id="3" name="TextBox 2"/>
-          <p:cNvSpPr txBox="1"/>
-          <p:nvPr/>
-        </p:nvSpPr>
-        <p:spPr>
-          <a:xfrm>
-            <a:off x="640000" y="760000"/>
-            <a:ext cx="10912000" cy="800000"/>
-          </a:xfrm>
-          <a:prstGeom prst="rect">
-            <a:avLst/>
-          </a:prstGeom>
-          <a:noFill/>
-        </p:spPr>
-        <p:txBody>
-          <a:bodyPr wrap="square">
-            <a:spAutoFit/>
-          </a:bodyPr>
-          <a:lstStyle/>
-          <a:p>
-            <a:pPr>
-              <a:spcAft>
-                <a:spcPts val="1710"/>
-              </a:spcAft>
-            </a:pPr>
-            <a:r>
-              <a:rPr sz="3800" b="1">
-                <a:solidFill>
-                  <a:srgbClr val="1F2A44"/>
-                </a:solidFill>
-                <a:latin typeface="Fredoka"/>
-              </a:rPr>
-              <a:t>⚠ ¿Doble falacia?</a:t>
-            </a:r>
-          </a:p>
-        </p:txBody>
-      </p:sp>
-      <p:sp>
-        <p:nvSpPr>
-          <p:cNvPr id="4" name="Rectangle 3"/>
-          <p:cNvSpPr/>
-          <p:nvPr/>
-        </p:nvSpPr>
-        <p:spPr>
-          <a:xfrm>
-            <a:off x="640000" y="1600000"/>
-            <a:ext cx="10912000" cy="1100000"/>
-          </a:xfrm>
-          <a:prstGeom prst="rect">
-            <a:avLst/>
-          </a:prstGeom>
-          <a:solidFill>
-            <a:srgbClr val="FBF7EF"/>
-          </a:solidFill>
-          <a:ln>
-            <a:noFill/>
-          </a:ln>
-        </p:spPr>
-        <p:style>
-          <a:lnRef idx="1">
-            <a:schemeClr val="accent1"/>
-          </a:lnRef>
-          <a:fillRef idx="3">
-            <a:schemeClr val="accent1"/>
-          </a:fillRef>
-          <a:effectRef idx="2">
-            <a:schemeClr val="accent1"/>
-          </a:effectRef>
-          <a:fontRef idx="minor">
-            <a:schemeClr val="lt1"/>
-          </a:fontRef>
-        </p:style>
-        <p:txBody>
-          <a:bodyPr rtlCol="0" anchor="ctr"/>
-          <a:lstStyle/>
-          <a:p>
-            <a:pPr algn="ctr"/>
-          </a:p>
-        </p:txBody>
-      </p:sp>
-      <p:sp>
-        <p:nvSpPr>
-          <p:cNvPr id="5" name="TextBox 4"/>
-          <p:cNvSpPr txBox="1"/>
-          <p:nvPr/>
-        </p:nvSpPr>
-        <p:spPr>
-          <a:xfrm>
-            <a:off x="840000" y="1650000"/>
-            <a:ext cx="10512000" cy="1000000"/>
-          </a:xfrm>
-          <a:prstGeom prst="rect">
-            <a:avLst/>
-          </a:prstGeom>
-          <a:noFill/>
-        </p:spPr>
-        <p:txBody>
-          <a:bodyPr wrap="square" anchor="ctr">
-            <a:spAutoFit/>
-          </a:bodyPr>
-          <a:lstStyle/>
-          <a:p>
-            <a:pPr>
-              <a:spcAft>
-                <a:spcPts val="1170"/>
-              </a:spcAft>
-            </a:pPr>
-            <a:r>
-              <a:rPr sz="2600" b="1">
-                <a:solidFill>
-                  <a:srgbClr val="1F2A44"/>
-                </a:solidFill>
-                <a:latin typeface="Nunito Sans"/>
-              </a:rPr>
-              <a:t>Un chico: «Sanidad y casi todos los médicos dicen que fumar causa cáncer, y lo repite todo el mundo. ¡Falacia de autoridad y ad populum!».</a:t>
-            </a:r>
-          </a:p>
-        </p:txBody>
-      </p:sp>
-      <p:sp>
-        <p:nvSpPr>
-          <p:cNvPr id="6" name="TextBox 5"/>
-          <p:cNvSpPr txBox="1"/>
-          <p:nvPr/>
-        </p:nvSpPr>
-        <p:spPr>
-          <a:xfrm>
-            <a:off x="640000" y="2900000"/>
-            <a:ext cx="10912000" cy="3500000"/>
-          </a:xfrm>
-          <a:prstGeom prst="rect">
-            <a:avLst/>
-          </a:prstGeom>
-          <a:noFill/>
-        </p:spPr>
-        <p:txBody>
-          <a:bodyPr wrap="square">
-            <a:spAutoFit/>
-          </a:bodyPr>
-          <a:lstStyle/>
-          <a:p>
-            <a:pPr>
-              <a:spcAft>
-                <a:spcPts val="1080"/>
-              </a:spcAft>
-            </a:pPr>
-            <a:r>
-              <a:rPr sz="2400" b="1">
-                <a:solidFill>
-                  <a:srgbClr val="E8793A"/>
-                </a:solidFill>
-                <a:latin typeface="Nunito Sans"/>
-              </a:rPr>
-              <a:t>1. </a:t>
-            </a:r>
-            <a:r>
-              <a:rPr sz="2400" b="0">
-                <a:solidFill>
-                  <a:srgbClr val="1F2A44"/>
-                </a:solidFill>
-                <a:latin typeface="Nunito Sans"/>
-              </a:rPr>
-              <a:t>Hay expertos y hay «todo el mundo»… ¿tiene razón ese chico?</a:t>
-            </a:r>
-          </a:p>
-          <a:p>
-            <a:pPr>
-              <a:spcAft>
-                <a:spcPts val="1080"/>
-              </a:spcAft>
-            </a:pPr>
-            <a:r>
-              <a:rPr sz="2400" b="1">
-                <a:solidFill>
-                  <a:srgbClr val="E8793A"/>
-                </a:solidFill>
-                <a:latin typeface="Nunito Sans"/>
-              </a:rPr>
-              <a:t>2. </a:t>
-            </a:r>
-            <a:r>
-              <a:rPr sz="2400" b="0">
-                <a:solidFill>
-                  <a:srgbClr val="1F2A44"/>
-                </a:solidFill>
-                <a:latin typeface="Nunito Sans"/>
-              </a:rPr>
-              <a:t>Parecen los dos trucos: «lo dicen los expertos» y «lo dice todo el mundo».</a:t>
-            </a:r>
-          </a:p>
-          <a:p>
-            <a:pPr>
-              <a:spcAft>
-                <a:spcPts val="1080"/>
-              </a:spcAft>
-            </a:pPr>
-            <a:r>
-              <a:rPr sz="2400" b="1">
-                <a:solidFill>
-                  <a:srgbClr val="E8793A"/>
-                </a:solidFill>
-                <a:latin typeface="Nunito Sans"/>
-              </a:rPr>
-              <a:t>3. </a:t>
-            </a:r>
-            <a:r>
-              <a:rPr sz="2400" b="0">
-                <a:solidFill>
-                  <a:srgbClr val="1F2A44"/>
-                </a:solidFill>
-                <a:latin typeface="Nunito Sans"/>
-              </a:rPr>
-              <a:t>Pero son expertos de su campo, casi todos de acuerdo y con muchísimos estudios: es consenso.</a:t>
-            </a:r>
-          </a:p>
-          <a:p>
-            <a:pPr>
-              <a:spcAft>
-                <a:spcPts val="1080"/>
-              </a:spcAft>
-            </a:pPr>
-            <a:r>
-              <a:rPr sz="2400" b="1">
-                <a:solidFill>
-                  <a:srgbClr val="E8793A"/>
-                </a:solidFill>
-                <a:latin typeface="Nunito Sans"/>
-              </a:rPr>
-              <a:t>4. </a:t>
-            </a:r>
-            <a:r>
-              <a:rPr sz="2400" b="0">
-                <a:solidFill>
-                  <a:srgbClr val="1F2A44"/>
-                </a:solidFill>
-                <a:latin typeface="Nunito Sans"/>
-              </a:rPr>
-              <a:t>Y aquí «todo el mundo» repite algo comprobado, no una moda.</a:t>
-            </a:r>
-          </a:p>
-          <a:p>
-            <a:pPr>
-              <a:spcAft>
-                <a:spcPts val="1080"/>
-              </a:spcAft>
-            </a:pPr>
-            <a:r>
-              <a:rPr sz="2400" b="1">
-                <a:solidFill>
-                  <a:srgbClr val="E8793A"/>
-                </a:solidFill>
-                <a:latin typeface="Nunito Sans"/>
-              </a:rPr>
-              <a:t>5. </a:t>
-            </a:r>
-            <a:r>
-              <a:rPr sz="2400" b="0">
-                <a:solidFill>
-                  <a:srgbClr val="1F2A44"/>
-                </a:solidFill>
-                <a:latin typeface="Nunito Sans"/>
-              </a:rPr>
-              <a:t>Conclusión: no es falacia. Fiarse del consenso es razonable; el error es fiarse sin mirar por qué.</a:t>
+              <a:rPr sz="2600" b="0">
+                <a:solidFill>
+                  <a:srgbClr val="4A5568"/>
+                </a:solidFill>
+                <a:latin typeface="Nunito Sans"/>
+              </a:rPr>
+              <a:t>Dos minutos. Después lo comparamos.</a:t>
             </a:r>
           </a:p>
         </p:txBody>
@@ -4721,8 +4579,8 @@
         </p:nvSpPr>
         <p:spPr>
           <a:xfrm>
-            <a:off x="640000" y="760000"/>
-            <a:ext cx="10912000" cy="800000"/>
+            <a:off x="640000" y="1300000"/>
+            <a:ext cx="10912000" cy="4800000"/>
           </a:xfrm>
           <a:prstGeom prst="rect">
             <a:avLst/>
@@ -4737,56 +4595,76 @@
           <a:p>
             <a:pPr>
               <a:spcAft>
-                <a:spcPts val="1710"/>
+                <a:spcPts val="1350"/>
               </a:spcAft>
             </a:pPr>
             <a:r>
-              <a:rPr sz="3800" b="1">
+              <a:rPr sz="3000" b="1">
+                <a:solidFill>
+                  <a:srgbClr val="E8793A"/>
+                </a:solidFill>
+                <a:latin typeface="Nunito Sans"/>
+              </a:rPr>
+              <a:t>1. </a:t>
+            </a:r>
+            <a:r>
+              <a:rPr sz="3000" b="0">
                 <a:solidFill>
                   <a:srgbClr val="1F2A44"/>
                 </a:solidFill>
-                <a:latin typeface="Fredoka"/>
-              </a:rPr>
-              <a:t>Escríbelo tú primero, sin mirar</a:t>
-            </a:r>
-          </a:p>
-        </p:txBody>
-      </p:sp>
-      <p:sp>
-        <p:nvSpPr>
-          <p:cNvPr id="4" name="TextBox 3"/>
-          <p:cNvSpPr txBox="1"/>
-          <p:nvPr/>
-        </p:nvSpPr>
-        <p:spPr>
-          <a:xfrm>
-            <a:off x="640000" y="1800000"/>
-            <a:ext cx="10912000" cy="1500000"/>
-          </a:xfrm>
-          <a:prstGeom prst="rect">
-            <a:avLst/>
-          </a:prstGeom>
-          <a:noFill/>
-        </p:spPr>
-        <p:txBody>
-          <a:bodyPr wrap="square">
-            <a:spAutoFit/>
-          </a:bodyPr>
-          <a:lstStyle/>
+                <a:latin typeface="Nunito Sans"/>
+              </a:rPr>
+              <a:t>En la unidad 5, las razones no bastan para la conclusión.</a:t>
+            </a:r>
+          </a:p>
           <a:p>
             <a:pPr>
               <a:spcAft>
-                <a:spcPts val="1170"/>
+                <a:spcPts val="1350"/>
               </a:spcAft>
             </a:pPr>
             <a:r>
-              <a:rPr sz="2600" b="0">
-                <a:solidFill>
-                  <a:srgbClr val="4A5568"/>
-                </a:solidFill>
-                <a:latin typeface="Nunito Sans"/>
-              </a:rPr>
-              <a:t>Dos minutos. Después lo comparamos.</a:t>
+              <a:rPr sz="3000" b="1">
+                <a:solidFill>
+                  <a:srgbClr val="E8793A"/>
+                </a:solidFill>
+                <a:latin typeface="Nunito Sans"/>
+              </a:rPr>
+              <a:t>2. </a:t>
+            </a:r>
+            <a:r>
+              <a:rPr sz="3000" b="0">
+                <a:solidFill>
+                  <a:srgbClr val="1F2A44"/>
+                </a:solidFill>
+                <a:latin typeface="Nunito Sans"/>
+              </a:rPr>
+              <a:t>Pocos casos, dos opciones, cadenas exageradas, causas falsas, vacíos de pruebas y círculos.</a:t>
+            </a:r>
+          </a:p>
+          <a:p>
+            <a:pPr>
+              <a:spcAft>
+                <a:spcPts val="1350"/>
+              </a:spcAft>
+            </a:pPr>
+            <a:r>
+              <a:rPr sz="3000" b="1">
+                <a:solidFill>
+                  <a:srgbClr val="E8793A"/>
+                </a:solidFill>
+                <a:latin typeface="Nunito Sans"/>
+              </a:rPr>
+              <a:t>3. </a:t>
+            </a:r>
+            <a:r>
+              <a:rPr sz="3000" b="0">
+                <a:solidFill>
+                  <a:srgbClr val="1F2A44"/>
+                </a:solidFill>
+                <a:latin typeface="Nunito Sans"/>
+              </a:rPr>
+              <a:t>Cada falacia tiene su pregunta: hazla antes de creerte la conclusión.</a:t>
             </a:r>
           </a:p>
         </p:txBody>
@@ -4800,169 +4678,6 @@
 </file>
 
 <file path=ppt/slides/slide15.xml><?xml version="1.0" encoding="utf-8"?>
-<p:sld xmlns:a="http://schemas.openxmlformats.org/drawingml/2006/main" xmlns:p="http://schemas.openxmlformats.org/presentationml/2006/main" xmlns:r="http://schemas.openxmlformats.org/officeDocument/2006/relationships">
-  <p:cSld>
-    <p:bg>
-      <p:bgPr>
-        <a:solidFill>
-          <a:srgbClr val="FBF7EF"/>
-        </a:solidFill>
-        <a:effectLst/>
-      </p:bgPr>
-    </p:bg>
-    <p:spTree>
-      <p:nvGrpSpPr>
-        <p:cNvPr id="1" name=""/>
-        <p:cNvGrpSpPr/>
-        <p:nvPr/>
-      </p:nvGrpSpPr>
-      <p:grpSpPr/>
-      <p:sp>
-        <p:nvSpPr>
-          <p:cNvPr id="2" name="TextBox 1"/>
-          <p:cNvSpPr txBox="1"/>
-          <p:nvPr/>
-        </p:nvSpPr>
-        <p:spPr>
-          <a:xfrm>
-            <a:off x="640000" y="380000"/>
-            <a:ext cx="10912000" cy="420000"/>
-          </a:xfrm>
-          <a:prstGeom prst="rect">
-            <a:avLst/>
-          </a:prstGeom>
-          <a:noFill/>
-        </p:spPr>
-        <p:txBody>
-          <a:bodyPr wrap="square">
-            <a:spAutoFit/>
-          </a:bodyPr>
-          <a:lstStyle/>
-          <a:p>
-            <a:pPr>
-              <a:spcAft>
-                <a:spcPts val="630"/>
-              </a:spcAft>
-            </a:pPr>
-            <a:r>
-              <a:rPr sz="1400" b="1">
-                <a:solidFill>
-                  <a:srgbClr val="E8793A"/>
-                </a:solidFill>
-                <a:latin typeface="Nunito Sans"/>
-              </a:rPr>
-              <a:t>LO DE HOY EN TRES LÍNEAS</a:t>
-            </a:r>
-          </a:p>
-        </p:txBody>
-      </p:sp>
-      <p:sp>
-        <p:nvSpPr>
-          <p:cNvPr id="3" name="TextBox 2"/>
-          <p:cNvSpPr txBox="1"/>
-          <p:nvPr/>
-        </p:nvSpPr>
-        <p:spPr>
-          <a:xfrm>
-            <a:off x="640000" y="1300000"/>
-            <a:ext cx="10912000" cy="4800000"/>
-          </a:xfrm>
-          <a:prstGeom prst="rect">
-            <a:avLst/>
-          </a:prstGeom>
-          <a:noFill/>
-        </p:spPr>
-        <p:txBody>
-          <a:bodyPr wrap="square">
-            <a:spAutoFit/>
-          </a:bodyPr>
-          <a:lstStyle/>
-          <a:p>
-            <a:pPr>
-              <a:spcAft>
-                <a:spcPts val="1350"/>
-              </a:spcAft>
-            </a:pPr>
-            <a:r>
-              <a:rPr sz="3000" b="1">
-                <a:solidFill>
-                  <a:srgbClr val="E8793A"/>
-                </a:solidFill>
-                <a:latin typeface="Nunito Sans"/>
-              </a:rPr>
-              <a:t>1. </a:t>
-            </a:r>
-            <a:r>
-              <a:rPr sz="3000" b="0">
-                <a:solidFill>
-                  <a:srgbClr val="1F2A44"/>
-                </a:solidFill>
-                <a:latin typeface="Nunito Sans"/>
-              </a:rPr>
-              <a:t>La autoridad por poder manda; la autoridad por saber da razones.</a:t>
-            </a:r>
-          </a:p>
-          <a:p>
-            <a:pPr>
-              <a:spcAft>
-                <a:spcPts val="1350"/>
-              </a:spcAft>
-            </a:pPr>
-            <a:r>
-              <a:rPr sz="3000" b="1">
-                <a:solidFill>
-                  <a:srgbClr val="E8793A"/>
-                </a:solidFill>
-                <a:latin typeface="Nunito Sans"/>
-              </a:rPr>
-              <a:t>2. </a:t>
-            </a:r>
-            <a:r>
-              <a:rPr sz="3000" b="0">
-                <a:solidFill>
-                  <a:srgbClr val="1F2A44"/>
-                </a:solidFill>
-                <a:latin typeface="Nunito Sans"/>
-              </a:rPr>
-              <a:t>La falacia de autoridad y ad populum usan a otros en lugar de pruebas.</a:t>
-            </a:r>
-          </a:p>
-          <a:p>
-            <a:pPr>
-              <a:spcAft>
-                <a:spcPts val="1350"/>
-              </a:spcAft>
-            </a:pPr>
-            <a:r>
-              <a:rPr sz="3000" b="1">
-                <a:solidFill>
-                  <a:srgbClr val="E8793A"/>
-                </a:solidFill>
-                <a:latin typeface="Nunito Sans"/>
-              </a:rPr>
-              <a:t>3. </a:t>
-            </a:r>
-            <a:r>
-              <a:rPr sz="3000" b="0">
-                <a:solidFill>
-                  <a:srgbClr val="1F2A44"/>
-                </a:solidFill>
-                <a:latin typeface="Nunito Sans"/>
-              </a:rPr>
-              <a:t>Asch y Milgram muestran que el grupo y la autoridad nos empujan, pero muchos resisten.</a:t>
-            </a:r>
-          </a:p>
-        </p:txBody>
-      </p:sp>
-    </p:spTree>
-  </p:cSld>
-  <p:clrMapOvr>
-    <a:masterClrMapping/>
-  </p:clrMapOvr>
-</p:sld>
-</file>
-
-<file path=ppt/slides/slide16.xml><?xml version="1.0" encoding="utf-8"?>
 <p:sld xmlns:a="http://schemas.openxmlformats.org/drawingml/2006/main" xmlns:p="http://schemas.openxmlformats.org/presentationml/2006/main" xmlns:r="http://schemas.openxmlformats.org/officeDocument/2006/relationships">
   <p:cSld>
     <p:bg>
@@ -5607,7 +5322,7 @@
                 </a:solidFill>
                 <a:latin typeface="Nunito Sans"/>
               </a:rPr>
-              <a:t>En el experimento de las líneas, unas 3 de cada ______ personas siguieron al grupo al menos una vez.  (sesión 29)</a:t>
+              <a:t>Apelación a la ignorancia: decir que algo es verdad porque nadie ha demostrado que sea ______.  (sesión 29)</a:t>
             </a:r>
           </a:p>
           <a:p>
@@ -5632,7 +5347,7 @@
                 </a:solidFill>
                 <a:latin typeface="Nunito Sans"/>
               </a:rPr>
-              <a:t>En la versión más conocida del experimento de las descargas, el ______ % llegó hasta la descarga más fuerte.  (sesión 29)</a:t>
+              <a:t>En el razonamiento circular, la conclusión ya está ______ en la premisa.  (sesión 29)</a:t>
             </a:r>
           </a:p>
           <a:p>
@@ -5657,7 +5372,7 @@
                 </a:solidFill>
                 <a:latin typeface="Nunito Sans"/>
               </a:rPr>
-              <a:t>La autoridad por ______ puede mandar; la autoridad por ______ sabe mucho de un tema.  (sesión 25)</a:t>
+              <a:t>En la generalización apresurada falla esta pregunta de una buena razón: ¿es ______?  (sesión 25)</a:t>
             </a:r>
           </a:p>
         </p:txBody>
@@ -5809,7 +5524,7 @@
                 </a:solidFill>
                 <a:latin typeface="Nunito Sans"/>
               </a:rPr>
-              <a:t>En el experimento de las líneas, unas 3 de cada </a:t>
+              <a:t>Apelación a la ignorancia: decir que algo es verdad porque nadie ha demostrado que sea </a:t>
             </a:r>
             <a:r>
               <a:rPr sz="2600" b="1">
@@ -5818,7 +5533,7 @@
                 </a:solidFill>
                 <a:latin typeface="Nunito Sans"/>
               </a:rPr>
-              <a:t>4</a:t>
+              <a:t>falso</a:t>
             </a:r>
             <a:r>
               <a:rPr sz="2600" b="0">
@@ -5827,7 +5542,7 @@
                 </a:solidFill>
                 <a:latin typeface="Nunito Sans"/>
               </a:rPr>
-              <a:t> personas siguieron al grupo al menos una vez.  (sesión 29)</a:t>
+              <a:t>.  (sesión 29)</a:t>
             </a:r>
           </a:p>
           <a:p>
@@ -5852,7 +5567,7 @@
                 </a:solidFill>
                 <a:latin typeface="Nunito Sans"/>
               </a:rPr>
-              <a:t>En la versión más conocida del experimento de las descargas, el </a:t>
+              <a:t>En el razonamiento circular, la conclusión ya está </a:t>
             </a:r>
             <a:r>
               <a:rPr sz="2600" b="1">
@@ -5861,7 +5576,7 @@
                 </a:solidFill>
                 <a:latin typeface="Nunito Sans"/>
               </a:rPr>
-              <a:t>65</a:t>
+              <a:t>escondida</a:t>
             </a:r>
             <a:r>
               <a:rPr sz="2600" b="0">
@@ -5870,7 +5585,7 @@
                 </a:solidFill>
                 <a:latin typeface="Nunito Sans"/>
               </a:rPr>
-              <a:t> % llegó hasta la descarga más fuerte.  (sesión 29)</a:t>
+              <a:t> en la premisa.  (sesión 29)</a:t>
             </a:r>
           </a:p>
           <a:p>
@@ -5895,7 +5610,7 @@
                 </a:solidFill>
                 <a:latin typeface="Nunito Sans"/>
               </a:rPr>
-              <a:t>La autoridad por </a:t>
+              <a:t>En la generalización apresurada falla esta pregunta de una buena razón: ¿es </a:t>
             </a:r>
             <a:r>
               <a:rPr sz="2600" b="1">
@@ -5904,7 +5619,7 @@
                 </a:solidFill>
                 <a:latin typeface="Nunito Sans"/>
               </a:rPr>
-              <a:t>poder</a:t>
+              <a:t>suficiente</a:t>
             </a:r>
             <a:r>
               <a:rPr sz="2600" b="0">
@@ -5913,25 +5628,7 @@
                 </a:solidFill>
                 <a:latin typeface="Nunito Sans"/>
               </a:rPr>
-              <a:t> puede mandar; la autoridad por </a:t>
-            </a:r>
-            <a:r>
-              <a:rPr sz="2600" b="1">
-                <a:solidFill>
-                  <a:srgbClr val="1F2A44"/>
-                </a:solidFill>
-                <a:latin typeface="Nunito Sans"/>
-              </a:rPr>
-              <a:t>saber</a:t>
-            </a:r>
-            <a:r>
-              <a:rPr sz="2600" b="0">
-                <a:solidFill>
-                  <a:srgbClr val="1F2A44"/>
-                </a:solidFill>
-                <a:latin typeface="Nunito Sans"/>
-              </a:rPr>
-              <a:t> sabe mucho de un tema.  (sesión 25)</a:t>
+              <a:t>?  (sesión 25)</a:t>
             </a:r>
           </a:p>
         </p:txBody>
@@ -6078,7 +5775,7 @@
                 </a:solidFill>
                 <a:latin typeface="Nunito Sans"/>
               </a:rPr>
-              <a:t>Cinco sesiones sobre a quién hacemos caso y por qué.</a:t>
+              <a:t>«Dos amigos míos dejaron el fútbol y suspendieron. O juegas al fútbol o suspendes. Y nadie ha demostrado lo contrario.»</a:t>
             </a:r>
           </a:p>
         </p:txBody>
@@ -6117,7 +5814,7 @@
                 </a:solidFill>
                 <a:latin typeface="Nunito Sans"/>
               </a:rPr>
-              <a:t>¿Qué idea de esta unidad te ha sorprendido más?</a:t>
+              <a:t>¿Cuántos trucos encuentras en estas tres frases?</a:t>
             </a:r>
           </a:p>
         </p:txBody>
@@ -6325,310 +6022,166 @@
                 </a:solidFill>
                 <a:latin typeface="Fredoka"/>
               </a:rPr>
-              <a:t>Dos tipos de autoridad (sesión 25)</a:t>
-            </a:r>
-          </a:p>
-        </p:txBody>
-      </p:sp>
-      <p:graphicFrame>
-        <p:nvGraphicFramePr>
-          <p:cNvPr id="4" name="Table 3"/>
-          <p:cNvGraphicFramePr>
-            <a:graphicFrameLocks noGrp="1"/>
-          </p:cNvGraphicFramePr>
+              <a:t>Razonar mal (unidad 5)</a:t>
+            </a:r>
+          </a:p>
+        </p:txBody>
+      </p:sp>
+      <p:sp>
+        <p:nvSpPr>
+          <p:cNvPr id="4" name="Rectangle 3"/>
+          <p:cNvSpPr/>
           <p:nvPr/>
-        </p:nvGraphicFramePr>
-        <p:xfrm>
-          <a:off x="640000" y="1700000"/>
-          <a:ext cx="10912000" cy="2400000"/>
-        </p:xfrm>
-        <a:graphic>
-          <a:graphicData uri="http://schemas.openxmlformats.org/drawingml/2006/table">
-            <a:tbl>
-              <a:tblPr firstRow="1" bandRow="1">
-                <a:tableStyleId>{5C22544A-7EE6-4342-B048-85BDC9FD1C3A}</a:tableStyleId>
-              </a:tblPr>
-              <a:tblGrid>
-                <a:gridCol w="3637333"/>
-                <a:gridCol w="3637333"/>
-                <a:gridCol w="3637334"/>
-              </a:tblGrid>
-              <a:tr h="600000">
-                <a:tc>
-                  <a:txBody>
-                    <a:bodyPr/>
-                    <a:lstStyle/>
-                    <a:p>
-                      <a:r>
-                        <a:rPr sz="2000" b="1">
-                          <a:solidFill>
-                            <a:srgbClr val="FBF7EF"/>
-                          </a:solidFill>
-                          <a:latin typeface="Fredoka"/>
-                        </a:rPr>
-                        <a:t/>
-                      </a:r>
-                    </a:p>
-                  </a:txBody>
-                  <a:tcPr>
-                    <a:solidFill>
-                      <a:srgbClr val="1F2A44"/>
-                    </a:solidFill>
-                  </a:tcPr>
-                </a:tc>
-                <a:tc>
-                  <a:txBody>
-                    <a:bodyPr/>
-                    <a:lstStyle/>
-                    <a:p>
-                      <a:r>
-                        <a:rPr sz="2000" b="1">
-                          <a:solidFill>
-                            <a:srgbClr val="FBF7EF"/>
-                          </a:solidFill>
-                          <a:latin typeface="Fredoka"/>
-                        </a:rPr>
-                        <a:t>Por poder</a:t>
-                      </a:r>
-                    </a:p>
-                  </a:txBody>
-                  <a:tcPr>
-                    <a:solidFill>
-                      <a:srgbClr val="1F2A44"/>
-                    </a:solidFill>
-                  </a:tcPr>
-                </a:tc>
-                <a:tc>
-                  <a:txBody>
-                    <a:bodyPr/>
-                    <a:lstStyle/>
-                    <a:p>
-                      <a:r>
-                        <a:rPr sz="2000" b="1">
-                          <a:solidFill>
-                            <a:srgbClr val="FBF7EF"/>
-                          </a:solidFill>
-                          <a:latin typeface="Fredoka"/>
-                        </a:rPr>
-                        <a:t>Por saber</a:t>
-                      </a:r>
-                    </a:p>
-                  </a:txBody>
-                  <a:tcPr>
-                    <a:solidFill>
-                      <a:srgbClr val="1F2A44"/>
-                    </a:solidFill>
-                  </a:tcPr>
-                </a:tc>
-              </a:tr>
-              <a:tr h="600000">
-                <a:tc>
-                  <a:txBody>
-                    <a:bodyPr/>
-                    <a:lstStyle/>
-                    <a:p>
-                      <a:r>
-                        <a:rPr sz="2000" b="1">
-                          <a:solidFill>
-                            <a:srgbClr val="1F2A44"/>
-                          </a:solidFill>
-                          <a:latin typeface="Nunito Sans"/>
-                        </a:rPr>
-                        <a:t>Qué tiene</a:t>
-                      </a:r>
-                    </a:p>
-                  </a:txBody>
-                  <a:tcPr>
-                    <a:solidFill>
-                      <a:srgbClr val="FFFFFF"/>
-                    </a:solidFill>
-                  </a:tcPr>
-                </a:tc>
-                <a:tc>
-                  <a:txBody>
-                    <a:bodyPr/>
-                    <a:lstStyle/>
-                    <a:p>
-                      <a:r>
-                        <a:rPr sz="2000" b="0">
-                          <a:solidFill>
-                            <a:srgbClr val="1F2A44"/>
-                          </a:solidFill>
-                          <a:latin typeface="Nunito Sans"/>
-                        </a:rPr>
-                        <a:t>Un cargo: puede mandar</a:t>
-                      </a:r>
-                    </a:p>
-                  </a:txBody>
-                  <a:tcPr>
-                    <a:solidFill>
-                      <a:srgbClr val="FFFFFF"/>
-                    </a:solidFill>
-                  </a:tcPr>
-                </a:tc>
-                <a:tc>
-                  <a:txBody>
-                    <a:bodyPr/>
-                    <a:lstStyle/>
-                    <a:p>
-                      <a:r>
-                        <a:rPr sz="2000" b="0">
-                          <a:solidFill>
-                            <a:srgbClr val="1F2A44"/>
-                          </a:solidFill>
-                          <a:latin typeface="Nunito Sans"/>
-                        </a:rPr>
-                        <a:t>Conocimiento de un tema</a:t>
-                      </a:r>
-                    </a:p>
-                  </a:txBody>
-                  <a:tcPr>
-                    <a:solidFill>
-                      <a:srgbClr val="FFFFFF"/>
-                    </a:solidFill>
-                  </a:tcPr>
-                </a:tc>
-              </a:tr>
-              <a:tr h="600000">
-                <a:tc>
-                  <a:txBody>
-                    <a:bodyPr/>
-                    <a:lstStyle/>
-                    <a:p>
-                      <a:r>
-                        <a:rPr sz="2000" b="1">
-                          <a:solidFill>
-                            <a:srgbClr val="1F2A44"/>
-                          </a:solidFill>
-                          <a:latin typeface="Nunito Sans"/>
-                        </a:rPr>
-                        <a:t>Qué me pide</a:t>
-                      </a:r>
-                    </a:p>
-                  </a:txBody>
-                  <a:tcPr>
-                    <a:solidFill>
-                      <a:srgbClr val="EAF0F7"/>
-                    </a:solidFill>
-                  </a:tcPr>
-                </a:tc>
-                <a:tc>
-                  <a:txBody>
-                    <a:bodyPr/>
-                    <a:lstStyle/>
-                    <a:p>
-                      <a:r>
-                        <a:rPr sz="2000" b="0">
-                          <a:solidFill>
-                            <a:srgbClr val="1F2A44"/>
-                          </a:solidFill>
-                          <a:latin typeface="Nunito Sans"/>
-                        </a:rPr>
-                        <a:t>Que obedezca</a:t>
-                      </a:r>
-                    </a:p>
-                  </a:txBody>
-                  <a:tcPr>
-                    <a:solidFill>
-                      <a:srgbClr val="EAF0F7"/>
-                    </a:solidFill>
-                  </a:tcPr>
-                </a:tc>
-                <a:tc>
-                  <a:txBody>
-                    <a:bodyPr/>
-                    <a:lstStyle/>
-                    <a:p>
-                      <a:r>
-                        <a:rPr sz="2000" b="0">
-                          <a:solidFill>
-                            <a:srgbClr val="1F2A44"/>
-                          </a:solidFill>
-                          <a:latin typeface="Nunito Sans"/>
-                        </a:rPr>
-                        <a:t>Que me crea lo que dice</a:t>
-                      </a:r>
-                    </a:p>
-                  </a:txBody>
-                  <a:tcPr>
-                    <a:solidFill>
-                      <a:srgbClr val="EAF0F7"/>
-                    </a:solidFill>
-                  </a:tcPr>
-                </a:tc>
-              </a:tr>
-              <a:tr h="600000">
-                <a:tc>
-                  <a:txBody>
-                    <a:bodyPr/>
-                    <a:lstStyle/>
-                    <a:p>
-                      <a:r>
-                        <a:rPr sz="2000" b="1">
-                          <a:solidFill>
-                            <a:srgbClr val="1F2A44"/>
-                          </a:solidFill>
-                          <a:latin typeface="Nunito Sans"/>
-                        </a:rPr>
-                        <a:t>Ejemplo</a:t>
-                      </a:r>
-                    </a:p>
-                  </a:txBody>
-                  <a:tcPr>
-                    <a:solidFill>
-                      <a:srgbClr val="FFFFFF"/>
-                    </a:solidFill>
-                  </a:tcPr>
-                </a:tc>
-                <a:tc>
-                  <a:txBody>
-                    <a:bodyPr/>
-                    <a:lstStyle/>
-                    <a:p>
-                      <a:r>
-                        <a:rPr sz="2000" b="0">
-                          <a:solidFill>
-                            <a:srgbClr val="1F2A44"/>
-                          </a:solidFill>
-                          <a:latin typeface="Nunito Sans"/>
-                        </a:rPr>
-                        <a:t>El árbitro</a:t>
-                      </a:r>
-                    </a:p>
-                  </a:txBody>
-                  <a:tcPr>
-                    <a:solidFill>
-                      <a:srgbClr val="FFFFFF"/>
-                    </a:solidFill>
-                  </a:tcPr>
-                </a:tc>
-                <a:tc>
-                  <a:txBody>
-                    <a:bodyPr/>
-                    <a:lstStyle/>
-                    <a:p>
-                      <a:r>
-                        <a:rPr sz="2000" b="0">
-                          <a:solidFill>
-                            <a:srgbClr val="1F2A44"/>
-                          </a:solidFill>
-                          <a:latin typeface="Nunito Sans"/>
-                        </a:rPr>
-                        <a:t>La mecánica</a:t>
-                      </a:r>
-                    </a:p>
-                  </a:txBody>
-                  <a:tcPr>
-                    <a:solidFill>
-                      <a:srgbClr val="FFFFFF"/>
-                    </a:solidFill>
-                  </a:tcPr>
-                </a:tc>
-              </a:tr>
-            </a:tbl>
-          </a:graphicData>
-        </a:graphic>
-      </p:graphicFrame>
+        </p:nvSpPr>
+        <p:spPr>
+          <a:xfrm>
+            <a:off x="640000" y="1650000"/>
+            <a:ext cx="10912000" cy="1150000"/>
+          </a:xfrm>
+          <a:prstGeom prst="rect">
+            <a:avLst/>
+          </a:prstGeom>
+          <a:solidFill>
+            <a:srgbClr val="EAF0F7"/>
+          </a:solidFill>
+          <a:ln>
+            <a:noFill/>
+          </a:ln>
+        </p:spPr>
+        <p:style>
+          <a:lnRef idx="1">
+            <a:schemeClr val="accent1"/>
+          </a:lnRef>
+          <a:fillRef idx="3">
+            <a:schemeClr val="accent1"/>
+          </a:fillRef>
+          <a:effectRef idx="2">
+            <a:schemeClr val="accent1"/>
+          </a:effectRef>
+          <a:fontRef idx="minor">
+            <a:schemeClr val="lt1"/>
+          </a:fontRef>
+        </p:style>
+        <p:txBody>
+          <a:bodyPr rtlCol="0" anchor="ctr"/>
+          <a:lstStyle/>
+          <a:p>
+            <a:pPr algn="ctr"/>
+          </a:p>
+        </p:txBody>
+      </p:sp>
+      <p:sp>
+        <p:nvSpPr>
+          <p:cNvPr id="5" name="TextBox 4"/>
+          <p:cNvSpPr txBox="1"/>
+          <p:nvPr/>
+        </p:nvSpPr>
+        <p:spPr>
+          <a:xfrm>
+            <a:off x="840000" y="1730000"/>
+            <a:ext cx="10512000" cy="1000000"/>
+          </a:xfrm>
+          <a:prstGeom prst="rect">
+            <a:avLst/>
+          </a:prstGeom>
+          <a:noFill/>
+        </p:spPr>
+        <p:txBody>
+          <a:bodyPr wrap="square" anchor="ctr">
+            <a:spAutoFit/>
+          </a:bodyPr>
+          <a:lstStyle/>
+          <a:p>
+            <a:pPr>
+              <a:spcAft>
+                <a:spcPts val="1260"/>
+              </a:spcAft>
+            </a:pPr>
+            <a:r>
+              <a:rPr sz="2800" b="1">
+                <a:solidFill>
+                  <a:srgbClr val="1F2A44"/>
+                </a:solidFill>
+                <a:latin typeface="Nunito Sans"/>
+              </a:rPr>
+              <a:t>En la unidad 4, las razones no venían a cuento. En esta, las razones no bastan para la conclusión.</a:t>
+            </a:r>
+          </a:p>
+        </p:txBody>
+      </p:sp>
+      <p:sp>
+        <p:nvSpPr>
+          <p:cNvPr id="6" name="TextBox 5"/>
+          <p:cNvSpPr txBox="1"/>
+          <p:nvPr/>
+        </p:nvSpPr>
+        <p:spPr>
+          <a:xfrm>
+            <a:off x="640000" y="3000000"/>
+            <a:ext cx="10912000" cy="3458000"/>
+          </a:xfrm>
+          <a:prstGeom prst="rect">
+            <a:avLst/>
+          </a:prstGeom>
+          <a:noFill/>
+        </p:spPr>
+        <p:txBody>
+          <a:bodyPr wrap="square">
+            <a:spAutoFit/>
+          </a:bodyPr>
+          <a:lstStyle/>
+          <a:p>
+            <a:pPr>
+              <a:spcAft>
+                <a:spcPts val="1260"/>
+              </a:spcAft>
+            </a:pPr>
+            <a:r>
+              <a:rPr sz="2800" b="1">
+                <a:solidFill>
+                  <a:srgbClr val="E8793A"/>
+                </a:solidFill>
+                <a:latin typeface="Nunito Sans"/>
+              </a:rPr>
+              <a:t>• </a:t>
+            </a:r>
+            <a:r>
+              <a:rPr sz="2800" b="0">
+                <a:solidFill>
+                  <a:srgbClr val="1F2A44"/>
+                </a:solidFill>
+                <a:latin typeface="Nunito Sans"/>
+              </a:rPr>
+              <a:t>Pocos casos, pocas opciones, pasos sin razones</a:t>
+            </a:r>
+          </a:p>
+          <a:p>
+            <a:pPr>
+              <a:spcAft>
+                <a:spcPts val="1260"/>
+              </a:spcAft>
+            </a:pPr>
+            <a:r>
+              <a:rPr sz="2800" b="1">
+                <a:solidFill>
+                  <a:srgbClr val="E8793A"/>
+                </a:solidFill>
+                <a:latin typeface="Nunito Sans"/>
+              </a:rPr>
+              <a:t>• </a:t>
+            </a:r>
+            <a:r>
+              <a:rPr sz="2800" b="0">
+                <a:solidFill>
+                  <a:srgbClr val="1F2A44"/>
+                </a:solidFill>
+                <a:latin typeface="Nunito Sans"/>
+              </a:rPr>
+              <a:t>Causas inventadas, vacíos de pruebas y círculos</a:t>
+            </a:r>
+          </a:p>
+        </p:txBody>
+      </p:sp>
     </p:spTree>
   </p:cSld>
   <p:clrMapOvr>
@@ -6728,7 +6281,7 @@
                 </a:solidFill>
                 <a:latin typeface="Fredoka"/>
               </a:rPr>
-              <a:t>Cuatro preguntas a un experto (sesión 26)</a:t>
+              <a:t>Sesiones 25, 26 y 27</a:t>
             </a:r>
           </a:p>
         </p:txBody>
@@ -6743,367 +6296,7 @@
         </p:nvGraphicFramePr>
         <p:xfrm>
           <a:off x="640000" y="1700000"/>
-          <a:ext cx="10912000" cy="3000000"/>
-        </p:xfrm>
-        <a:graphic>
-          <a:graphicData uri="http://schemas.openxmlformats.org/drawingml/2006/table">
-            <a:tbl>
-              <a:tblPr firstRow="1" bandRow="1">
-                <a:tableStyleId>{5C22544A-7EE6-4342-B048-85BDC9FD1C3A}</a:tableStyleId>
-              </a:tblPr>
-              <a:tblGrid>
-                <a:gridCol w="5456000"/>
-                <a:gridCol w="5456000"/>
-              </a:tblGrid>
-              <a:tr h="600000">
-                <a:tc>
-                  <a:txBody>
-                    <a:bodyPr/>
-                    <a:lstStyle/>
-                    <a:p>
-                      <a:r>
-                        <a:rPr sz="2000" b="1">
-                          <a:solidFill>
-                            <a:srgbClr val="FBF7EF"/>
-                          </a:solidFill>
-                          <a:latin typeface="Fredoka"/>
-                        </a:rPr>
-                        <a:t>Mira…</a:t>
-                      </a:r>
-                    </a:p>
-                  </a:txBody>
-                  <a:tcPr>
-                    <a:solidFill>
-                      <a:srgbClr val="1F2A44"/>
-                    </a:solidFill>
-                  </a:tcPr>
-                </a:tc>
-                <a:tc>
-                  <a:txBody>
-                    <a:bodyPr/>
-                    <a:lstStyle/>
-                    <a:p>
-                      <a:r>
-                        <a:rPr sz="2000" b="1">
-                          <a:solidFill>
-                            <a:srgbClr val="FBF7EF"/>
-                          </a:solidFill>
-                          <a:latin typeface="Fredoka"/>
-                        </a:rPr>
-                        <a:t>Pregunta</a:t>
-                      </a:r>
-                    </a:p>
-                  </a:txBody>
-                  <a:tcPr>
-                    <a:solidFill>
-                      <a:srgbClr val="1F2A44"/>
-                    </a:solidFill>
-                  </a:tcPr>
-                </a:tc>
-              </a:tr>
-              <a:tr h="600000">
-                <a:tc>
-                  <a:txBody>
-                    <a:bodyPr/>
-                    <a:lstStyle/>
-                    <a:p>
-                      <a:r>
-                        <a:rPr sz="2000" b="1">
-                          <a:solidFill>
-                            <a:srgbClr val="1F2A44"/>
-                          </a:solidFill>
-                          <a:latin typeface="Nunito Sans"/>
-                        </a:rPr>
-                        <a:t>Su campo</a:t>
-                      </a:r>
-                    </a:p>
-                  </a:txBody>
-                  <a:tcPr>
-                    <a:solidFill>
-                      <a:srgbClr val="FFFFFF"/>
-                    </a:solidFill>
-                  </a:tcPr>
-                </a:tc>
-                <a:tc>
-                  <a:txBody>
-                    <a:bodyPr/>
-                    <a:lstStyle/>
-                    <a:p>
-                      <a:r>
-                        <a:rPr sz="2000" b="0">
-                          <a:solidFill>
-                            <a:srgbClr val="1F2A44"/>
-                          </a:solidFill>
-                          <a:latin typeface="Nunito Sans"/>
-                        </a:rPr>
-                        <a:t>¿Habla de lo que ha estudiado?</a:t>
-                      </a:r>
-                    </a:p>
-                  </a:txBody>
-                  <a:tcPr>
-                    <a:solidFill>
-                      <a:srgbClr val="FFFFFF"/>
-                    </a:solidFill>
-                  </a:tcPr>
-                </a:tc>
-              </a:tr>
-              <a:tr h="600000">
-                <a:tc>
-                  <a:txBody>
-                    <a:bodyPr/>
-                    <a:lstStyle/>
-                    <a:p>
-                      <a:r>
-                        <a:rPr sz="2000" b="1">
-                          <a:solidFill>
-                            <a:srgbClr val="1F2A44"/>
-                          </a:solidFill>
-                          <a:latin typeface="Nunito Sans"/>
-                        </a:rPr>
-                        <a:t>El consenso</a:t>
-                      </a:r>
-                    </a:p>
-                  </a:txBody>
-                  <a:tcPr>
-                    <a:solidFill>
-                      <a:srgbClr val="EAF0F7"/>
-                    </a:solidFill>
-                  </a:tcPr>
-                </a:tc>
-                <a:tc>
-                  <a:txBody>
-                    <a:bodyPr/>
-                    <a:lstStyle/>
-                    <a:p>
-                      <a:r>
-                        <a:rPr sz="2000" b="0">
-                          <a:solidFill>
-                            <a:srgbClr val="1F2A44"/>
-                          </a:solidFill>
-                          <a:latin typeface="Nunito Sans"/>
-                        </a:rPr>
-                        <a:t>¿Qué dicen la mayoría de los expertos?</a:t>
-                      </a:r>
-                    </a:p>
-                  </a:txBody>
-                  <a:tcPr>
-                    <a:solidFill>
-                      <a:srgbClr val="EAF0F7"/>
-                    </a:solidFill>
-                  </a:tcPr>
-                </a:tc>
-              </a:tr>
-              <a:tr h="600000">
-                <a:tc>
-                  <a:txBody>
-                    <a:bodyPr/>
-                    <a:lstStyle/>
-                    <a:p>
-                      <a:r>
-                        <a:rPr sz="2000" b="1">
-                          <a:solidFill>
-                            <a:srgbClr val="1F2A44"/>
-                          </a:solidFill>
-                          <a:latin typeface="Nunito Sans"/>
-                        </a:rPr>
-                        <a:t>Sus intereses</a:t>
-                      </a:r>
-                    </a:p>
-                  </a:txBody>
-                  <a:tcPr>
-                    <a:solidFill>
-                      <a:srgbClr val="FFFFFF"/>
-                    </a:solidFill>
-                  </a:tcPr>
-                </a:tc>
-                <a:tc>
-                  <a:txBody>
-                    <a:bodyPr/>
-                    <a:lstStyle/>
-                    <a:p>
-                      <a:r>
-                        <a:rPr sz="2000" b="0">
-                          <a:solidFill>
-                            <a:srgbClr val="1F2A44"/>
-                          </a:solidFill>
-                          <a:latin typeface="Nunito Sans"/>
-                        </a:rPr>
-                        <a:t>¿Gana algo si le creo?</a:t>
-                      </a:r>
-                    </a:p>
-                  </a:txBody>
-                  <a:tcPr>
-                    <a:solidFill>
-                      <a:srgbClr val="FFFFFF"/>
-                    </a:solidFill>
-                  </a:tcPr>
-                </a:tc>
-              </a:tr>
-              <a:tr h="600000">
-                <a:tc>
-                  <a:txBody>
-                    <a:bodyPr/>
-                    <a:lstStyle/>
-                    <a:p>
-                      <a:r>
-                        <a:rPr sz="2000" b="1">
-                          <a:solidFill>
-                            <a:srgbClr val="1F2A44"/>
-                          </a:solidFill>
-                          <a:latin typeface="Nunito Sans"/>
-                        </a:rPr>
-                        <a:t>Sus pruebas</a:t>
-                      </a:r>
-                    </a:p>
-                  </a:txBody>
-                  <a:tcPr>
-                    <a:solidFill>
-                      <a:srgbClr val="EAF0F7"/>
-                    </a:solidFill>
-                  </a:tcPr>
-                </a:tc>
-                <a:tc>
-                  <a:txBody>
-                    <a:bodyPr/>
-                    <a:lstStyle/>
-                    <a:p>
-                      <a:r>
-                        <a:rPr sz="2000" b="0">
-                          <a:solidFill>
-                            <a:srgbClr val="1F2A44"/>
-                          </a:solidFill>
-                          <a:latin typeface="Nunito Sans"/>
-                        </a:rPr>
-                        <a:t>¿Explica cómo lo sabe?</a:t>
-                      </a:r>
-                    </a:p>
-                  </a:txBody>
-                  <a:tcPr>
-                    <a:solidFill>
-                      <a:srgbClr val="EAF0F7"/>
-                    </a:solidFill>
-                  </a:tcPr>
-                </a:tc>
-              </a:tr>
-            </a:tbl>
-          </a:graphicData>
-        </a:graphic>
-      </p:graphicFrame>
-    </p:spTree>
-  </p:cSld>
-  <p:clrMapOvr>
-    <a:masterClrMapping/>
-  </p:clrMapOvr>
-</p:sld>
-</file>
-
-<file path=ppt/slides/slide8.xml><?xml version="1.0" encoding="utf-8"?>
-<p:sld xmlns:a="http://schemas.openxmlformats.org/drawingml/2006/main" xmlns:p="http://schemas.openxmlformats.org/presentationml/2006/main" xmlns:r="http://schemas.openxmlformats.org/officeDocument/2006/relationships">
-  <p:cSld>
-    <p:bg>
-      <p:bgPr>
-        <a:solidFill>
-          <a:srgbClr val="FBF7EF"/>
-        </a:solidFill>
-        <a:effectLst/>
-      </p:bgPr>
-    </p:bg>
-    <p:spTree>
-      <p:nvGrpSpPr>
-        <p:cNvPr id="1" name=""/>
-        <p:cNvGrpSpPr/>
-        <p:nvPr/>
-      </p:nvGrpSpPr>
-      <p:grpSpPr/>
-      <p:sp>
-        <p:nvSpPr>
-          <p:cNvPr id="2" name="TextBox 1"/>
-          <p:cNvSpPr txBox="1"/>
-          <p:nvPr/>
-        </p:nvSpPr>
-        <p:spPr>
-          <a:xfrm>
-            <a:off x="640000" y="380000"/>
-            <a:ext cx="10912000" cy="420000"/>
-          </a:xfrm>
-          <a:prstGeom prst="rect">
-            <a:avLst/>
-          </a:prstGeom>
-          <a:noFill/>
-        </p:spPr>
-        <p:txBody>
-          <a:bodyPr wrap="square">
-            <a:spAutoFit/>
-          </a:bodyPr>
-          <a:lstStyle/>
-          <a:p>
-            <a:pPr>
-              <a:spcAft>
-                <a:spcPts val="630"/>
-              </a:spcAft>
-            </a:pPr>
-            <a:r>
-              <a:rPr sz="1400" b="1">
-                <a:solidFill>
-                  <a:srgbClr val="E8793A"/>
-                </a:solidFill>
-                <a:latin typeface="Nunito Sans"/>
-              </a:rPr>
-              <a:t>BLOQUE 1 · REPASO DE LA UNIDAD</a:t>
-            </a:r>
-          </a:p>
-        </p:txBody>
-      </p:sp>
-      <p:sp>
-        <p:nvSpPr>
-          <p:cNvPr id="3" name="TextBox 2"/>
-          <p:cNvSpPr txBox="1"/>
-          <p:nvPr/>
-        </p:nvSpPr>
-        <p:spPr>
-          <a:xfrm>
-            <a:off x="640000" y="760000"/>
-            <a:ext cx="10912000" cy="800000"/>
-          </a:xfrm>
-          <a:prstGeom prst="rect">
-            <a:avLst/>
-          </a:prstGeom>
-          <a:noFill/>
-        </p:spPr>
-        <p:txBody>
-          <a:bodyPr wrap="square">
-            <a:spAutoFit/>
-          </a:bodyPr>
-          <a:lstStyle/>
-          <a:p>
-            <a:pPr>
-              <a:spcAft>
-                <a:spcPts val="1710"/>
-              </a:spcAft>
-            </a:pPr>
-            <a:r>
-              <a:rPr sz="3800" b="1">
-                <a:solidFill>
-                  <a:srgbClr val="1F2A44"/>
-                </a:solidFill>
-                <a:latin typeface="Fredoka"/>
-              </a:rPr>
-              <a:t>Dos falacias (sesiones 27 y 28)</a:t>
-            </a:r>
-          </a:p>
-        </p:txBody>
-      </p:sp>
-      <p:graphicFrame>
-        <p:nvGraphicFramePr>
-          <p:cNvPr id="4" name="Table 3"/>
-          <p:cNvGraphicFramePr>
-            <a:graphicFrameLocks noGrp="1"/>
-          </p:cNvGraphicFramePr>
-          <p:nvPr/>
-        </p:nvGraphicFramePr>
-        <p:xfrm>
-          <a:off x="640000" y="1700000"/>
-          <a:ext cx="10912000" cy="1800000"/>
+          <a:ext cx="10912000" cy="2400000"/>
         </p:xfrm>
         <a:graphic>
           <a:graphicData uri="http://schemas.openxmlformats.org/drawingml/2006/table">
@@ -7151,7 +6344,7 @@
                           </a:solidFill>
                           <a:latin typeface="Fredoka"/>
                         </a:rPr>
-                        <a:t>Qué dice</a:t>
+                        <a:t>El truco</a:t>
                       </a:r>
                     </a:p>
                   </a:txBody>
@@ -7173,7 +6366,7 @@
                           </a:solidFill>
                           <a:latin typeface="Fredoka"/>
                         </a:rPr>
-                        <a:t>Trucos</a:t>
+                        <a:t>La pregunta que la desmonta</a:t>
                       </a:r>
                     </a:p>
                   </a:txBody>
@@ -7191,13 +6384,13 @@
                     <a:lstStyle/>
                     <a:p>
                       <a:r>
-                        <a:rPr sz="2000" b="1">
+                        <a:rPr sz="2000" b="0">
                           <a:solidFill>
                             <a:srgbClr val="1F2A44"/>
                           </a:solidFill>
                           <a:latin typeface="Nunito Sans"/>
                         </a:rPr>
-                        <a:t>De autoridad</a:t>
+                        <a:t>Generalización apresurada</a:t>
                       </a:r>
                     </a:p>
                   </a:txBody>
@@ -7219,7 +6412,7 @@
                           </a:solidFill>
                           <a:latin typeface="Nunito Sans"/>
                         </a:rPr>
-                        <a:t>«Lo dice alguien importante»</a:t>
+                        <a:t>De pocos casos a «todos»</a:t>
                       </a:r>
                     </a:p>
                   </a:txBody>
@@ -7241,7 +6434,7 @@
                           </a:solidFill>
                           <a:latin typeface="Nunito Sans"/>
                         </a:rPr>
-                        <a:t>El famoso, la bata blanca, «los expertos dicen»</a:t>
+                        <a:t>¿Cuántos casos has mirado?</a:t>
                       </a:r>
                     </a:p>
                   </a:txBody>
@@ -7259,13 +6452,13 @@
                     <a:lstStyle/>
                     <a:p>
                       <a:r>
-                        <a:rPr sz="2000" b="1">
+                        <a:rPr sz="2000" b="0">
                           <a:solidFill>
                             <a:srgbClr val="1F2A44"/>
                           </a:solidFill>
                           <a:latin typeface="Nunito Sans"/>
                         </a:rPr>
-                        <a:t>De la mayoría</a:t>
+                        <a:t>Falso dilema</a:t>
                       </a:r>
                     </a:p>
                   </a:txBody>
@@ -7287,7 +6480,7 @@
                           </a:solidFill>
                           <a:latin typeface="Nunito Sans"/>
                         </a:rPr>
-                        <a:t>«Lo hace todo el mundo»</a:t>
+                        <a:t>Solo dos opciones</a:t>
                       </a:r>
                     </a:p>
                   </a:txBody>
@@ -7309,13 +6502,81 @@
                           </a:solidFill>
                           <a:latin typeface="Nunito Sans"/>
                         </a:rPr>
-                        <a:t>Los «me gusta», las colas, las modas</a:t>
+                        <a:t>¿Seguro que no hay una tercera?</a:t>
                       </a:r>
                     </a:p>
                   </a:txBody>
                   <a:tcPr>
                     <a:solidFill>
                       <a:srgbClr val="EAF0F7"/>
+                    </a:solidFill>
+                  </a:tcPr>
+                </a:tc>
+              </a:tr>
+              <a:tr h="600000">
+                <a:tc>
+                  <a:txBody>
+                    <a:bodyPr/>
+                    <a:lstStyle/>
+                    <a:p>
+                      <a:r>
+                        <a:rPr sz="2000" b="0">
+                          <a:solidFill>
+                            <a:srgbClr val="1F2A44"/>
+                          </a:solidFill>
+                          <a:latin typeface="Nunito Sans"/>
+                        </a:rPr>
+                        <a:t>Pendiente resbaladiza</a:t>
+                      </a:r>
+                    </a:p>
+                  </a:txBody>
+                  <a:tcPr>
+                    <a:solidFill>
+                      <a:srgbClr val="FFFFFF"/>
+                    </a:solidFill>
+                  </a:tcPr>
+                </a:tc>
+                <a:tc>
+                  <a:txBody>
+                    <a:bodyPr/>
+                    <a:lstStyle/>
+                    <a:p>
+                      <a:r>
+                        <a:rPr sz="2000" b="0">
+                          <a:solidFill>
+                            <a:srgbClr val="1F2A44"/>
+                          </a:solidFill>
+                          <a:latin typeface="Nunito Sans"/>
+                        </a:rPr>
+                        <a:t>Cadena de pasos terribles</a:t>
+                      </a:r>
+                    </a:p>
+                  </a:txBody>
+                  <a:tcPr>
+                    <a:solidFill>
+                      <a:srgbClr val="FFFFFF"/>
+                    </a:solidFill>
+                  </a:tcPr>
+                </a:tc>
+                <a:tc>
+                  <a:txBody>
+                    <a:bodyPr/>
+                    <a:lstStyle/>
+                    <a:p>
+                      <a:r>
+                        <a:rPr sz="2000" b="0">
+                          <a:solidFill>
+                            <a:srgbClr val="1F2A44"/>
+                          </a:solidFill>
+                          <a:latin typeface="Nunito Sans"/>
+                        </a:rPr>
+                        <a:t>¿Por qué un paso lleva al siguiente?</a:t>
+                      </a:r>
+                    </a:p>
+                  </a:txBody>
+                  <a:tcPr>
+                    <a:solidFill>
+                      <a:srgbClr val="FFFFFF"/>
                     </a:solidFill>
                   </a:tcPr>
                 </a:tc>
@@ -7332,7 +6593,7 @@
 </p:sld>
 </file>
 
-<file path=ppt/slides/slide9.xml><?xml version="1.0" encoding="utf-8"?>
+<file path=ppt/slides/slide8.xml><?xml version="1.0" encoding="utf-8"?>
 <p:sld xmlns:a="http://schemas.openxmlformats.org/drawingml/2006/main" xmlns:p="http://schemas.openxmlformats.org/presentationml/2006/main" xmlns:r="http://schemas.openxmlformats.org/officeDocument/2006/relationships">
   <p:cSld>
     <p:bg>
@@ -7423,7 +6684,7 @@
                 </a:solidFill>
                 <a:latin typeface="Fredoka"/>
               </a:rPr>
-              <a:t>Asch y Milgram (sesión 29)</a:t>
+              <a:t>Sesiones 28 y 29</a:t>
             </a:r>
           </a:p>
         </p:txBody>
@@ -7464,7 +6725,7 @@
                           </a:solidFill>
                           <a:latin typeface="Fredoka"/>
                         </a:rPr>
-                        <a:t/>
+                        <a:t>Falacia</a:t>
                       </a:r>
                     </a:p>
                   </a:txBody>
@@ -7486,7 +6747,7 @@
                           </a:solidFill>
                           <a:latin typeface="Fredoka"/>
                         </a:rPr>
-                        <a:t>Asch</a:t>
+                        <a:t>El truco</a:t>
                       </a:r>
                     </a:p>
                   </a:txBody>
@@ -7508,7 +6769,7 @@
                           </a:solidFill>
                           <a:latin typeface="Fredoka"/>
                         </a:rPr>
-                        <a:t>Milgram</a:t>
+                        <a:t>La pregunta que la desmonta</a:t>
                       </a:r>
                     </a:p>
                   </a:txBody>
@@ -7526,13 +6787,13 @@
                     <a:lstStyle/>
                     <a:p>
                       <a:r>
-                        <a:rPr sz="2000" b="1">
+                        <a:rPr sz="2000" b="0">
                           <a:solidFill>
                             <a:srgbClr val="1F2A44"/>
                           </a:solidFill>
                           <a:latin typeface="Nunito Sans"/>
                         </a:rPr>
-                        <a:t>Qué estudia</a:t>
+                        <a:t>Causa falsa</a:t>
                       </a:r>
                     </a:p>
                   </a:txBody>
@@ -7554,7 +6815,7 @@
                           </a:solidFill>
                           <a:latin typeface="Nunito Sans"/>
                         </a:rPr>
-                        <a:t>Conformidad: seguir al grupo</a:t>
+                        <a:t>Después de, luego por culpa de</a:t>
                       </a:r>
                     </a:p>
                   </a:txBody>
@@ -7576,7 +6837,7 @@
                           </a:solidFill>
                           <a:latin typeface="Nunito Sans"/>
                         </a:rPr>
-                        <a:t>Obediencia: seguir a una autoridad</a:t>
+                        <a:t>¿Casualidad u otra causa?</a:t>
                       </a:r>
                     </a:p>
                   </a:txBody>
@@ -7594,13 +6855,13 @@
                     <a:lstStyle/>
                     <a:p>
                       <a:r>
-                        <a:rPr sz="2000" b="1">
+                        <a:rPr sz="2000" b="0">
                           <a:solidFill>
                             <a:srgbClr val="1F2A44"/>
                           </a:solidFill>
                           <a:latin typeface="Nunito Sans"/>
                         </a:rPr>
-                        <a:t>Qué pasó</a:t>
+                        <a:t>Apelación a la ignorancia</a:t>
                       </a:r>
                     </a:p>
                   </a:txBody>
@@ -7622,7 +6883,7 @@
                           </a:solidFill>
                           <a:latin typeface="Nunito Sans"/>
                         </a:rPr>
-                        <a:t>3 de cada 4 cedieron alguna vez; 1 de cada 4, nunca</a:t>
+                        <a:t>Nadie demostró que no, luego sí</a:t>
                       </a:r>
                     </a:p>
                   </a:txBody>
@@ -7644,7 +6905,7 @@
                           </a:solidFill>
                           <a:latin typeface="Nunito Sans"/>
                         </a:rPr>
-                        <a:t>El 65 % llegó al final en la versión más conocida</a:t>
+                        <a:t>¿Qué pruebas hay a favor?</a:t>
                       </a:r>
                     </a:p>
                   </a:txBody>
@@ -7662,13 +6923,13 @@
                     <a:lstStyle/>
                     <a:p>
                       <a:r>
-                        <a:rPr sz="2000" b="1">
+                        <a:rPr sz="2000" b="0">
                           <a:solidFill>
                             <a:srgbClr val="1F2A44"/>
                           </a:solidFill>
                           <a:latin typeface="Nunito Sans"/>
                         </a:rPr>
-                        <a:t>Qué ayudó a resistir</a:t>
+                        <a:t>Razonamiento circular</a:t>
                       </a:r>
                     </a:p>
                   </a:txBody>
@@ -7690,7 +6951,7 @@
                           </a:solidFill>
                           <a:latin typeface="Nunito Sans"/>
                         </a:rPr>
-                        <a:t>Tener un aliado</a:t>
+                        <a:t>La conclusión es la razón</a:t>
                       </a:r>
                     </a:p>
                   </a:txBody>
@@ -7712,7 +6973,7 @@
                           </a:solidFill>
                           <a:latin typeface="Nunito Sans"/>
                         </a:rPr>
-                        <a:t>Ver a otros negarse</a:t>
+                        <a:t>¿La razón dice algo distinto?</a:t>
                       </a:r>
                     </a:p>
                   </a:txBody>
@@ -7727,6 +6988,520 @@
           </a:graphicData>
         </a:graphic>
       </p:graphicFrame>
+    </p:spTree>
+  </p:cSld>
+  <p:clrMapOvr>
+    <a:masterClrMapping/>
+  </p:clrMapOvr>
+</p:sld>
+</file>
+
+<file path=ppt/slides/slide9.xml><?xml version="1.0" encoding="utf-8"?>
+<p:sld xmlns:a="http://schemas.openxmlformats.org/drawingml/2006/main" xmlns:p="http://schemas.openxmlformats.org/presentationml/2006/main" xmlns:r="http://schemas.openxmlformats.org/officeDocument/2006/relationships">
+  <p:cSld>
+    <p:bg>
+      <p:bgPr>
+        <a:solidFill>
+          <a:srgbClr val="FBF7EF"/>
+        </a:solidFill>
+        <a:effectLst/>
+      </p:bgPr>
+    </p:bg>
+    <p:spTree>
+      <p:nvGrpSpPr>
+        <p:cNvPr id="1" name=""/>
+        <p:cNvGrpSpPr/>
+        <p:nvPr/>
+      </p:nvGrpSpPr>
+      <p:grpSpPr/>
+      <p:sp>
+        <p:nvSpPr>
+          <p:cNvPr id="2" name="TextBox 1"/>
+          <p:cNvSpPr txBox="1"/>
+          <p:nvPr/>
+        </p:nvSpPr>
+        <p:spPr>
+          <a:xfrm>
+            <a:off x="640000" y="380000"/>
+            <a:ext cx="10912000" cy="420000"/>
+          </a:xfrm>
+          <a:prstGeom prst="rect">
+            <a:avLst/>
+          </a:prstGeom>
+          <a:noFill/>
+        </p:spPr>
+        <p:txBody>
+          <a:bodyPr wrap="square">
+            <a:spAutoFit/>
+          </a:bodyPr>
+          <a:lstStyle/>
+          <a:p>
+            <a:pPr>
+              <a:spcAft>
+                <a:spcPts val="630"/>
+              </a:spcAft>
+            </a:pPr>
+            <a:r>
+              <a:rPr sz="1400" b="1">
+                <a:solidFill>
+                  <a:srgbClr val="E8793A"/>
+                </a:solidFill>
+                <a:latin typeface="Nunito Sans"/>
+              </a:rPr>
+              <a:t>BLOQUE 1 · REPASO DE LA UNIDAD</a:t>
+            </a:r>
+          </a:p>
+        </p:txBody>
+      </p:sp>
+      <p:sp>
+        <p:nvSpPr>
+          <p:cNvPr id="3" name="TextBox 2"/>
+          <p:cNvSpPr txBox="1"/>
+          <p:nvPr/>
+        </p:nvSpPr>
+        <p:spPr>
+          <a:xfrm>
+            <a:off x="640000" y="760000"/>
+            <a:ext cx="10912000" cy="800000"/>
+          </a:xfrm>
+          <a:prstGeom prst="rect">
+            <a:avLst/>
+          </a:prstGeom>
+          <a:noFill/>
+        </p:spPr>
+        <p:txBody>
+          <a:bodyPr wrap="square">
+            <a:spAutoFit/>
+          </a:bodyPr>
+          <a:lstStyle/>
+          <a:p>
+            <a:pPr>
+              <a:spcAft>
+                <a:spcPts val="1710"/>
+              </a:spcAft>
+            </a:pPr>
+            <a:r>
+              <a:rPr sz="3800" b="1">
+                <a:solidFill>
+                  <a:srgbClr val="1F2A44"/>
+                </a:solidFill>
+                <a:latin typeface="Fredoka"/>
+              </a:rPr>
+              <a:t>Lo que no es falacia</a:t>
+            </a:r>
+          </a:p>
+        </p:txBody>
+      </p:sp>
+      <p:sp>
+        <p:nvSpPr>
+          <p:cNvPr id="4" name="Rectangle 3"/>
+          <p:cNvSpPr/>
+          <p:nvPr/>
+        </p:nvSpPr>
+        <p:spPr>
+          <a:xfrm>
+            <a:off x="640000" y="1650000"/>
+            <a:ext cx="5306000" cy="4400000"/>
+          </a:xfrm>
+          <a:prstGeom prst="rect">
+            <a:avLst/>
+          </a:prstGeom>
+          <a:solidFill>
+            <a:srgbClr val="FBE3D2"/>
+          </a:solidFill>
+          <a:ln>
+            <a:noFill/>
+          </a:ln>
+        </p:spPr>
+        <p:style>
+          <a:lnRef idx="1">
+            <a:schemeClr val="accent1"/>
+          </a:lnRef>
+          <a:fillRef idx="3">
+            <a:schemeClr val="accent1"/>
+          </a:fillRef>
+          <a:effectRef idx="2">
+            <a:schemeClr val="accent1"/>
+          </a:effectRef>
+          <a:fontRef idx="minor">
+            <a:schemeClr val="lt1"/>
+          </a:fontRef>
+        </p:style>
+        <p:txBody>
+          <a:bodyPr rtlCol="0" anchor="ctr"/>
+          <a:lstStyle/>
+          <a:p>
+            <a:pPr algn="ctr"/>
+          </a:p>
+        </p:txBody>
+      </p:sp>
+      <p:sp>
+        <p:nvSpPr>
+          <p:cNvPr id="5" name="TextBox 4"/>
+          <p:cNvSpPr txBox="1"/>
+          <p:nvPr/>
+        </p:nvSpPr>
+        <p:spPr>
+          <a:xfrm>
+            <a:off x="840000" y="1750000"/>
+            <a:ext cx="4906000" cy="600000"/>
+          </a:xfrm>
+          <a:prstGeom prst="rect">
+            <a:avLst/>
+          </a:prstGeom>
+          <a:noFill/>
+        </p:spPr>
+        <p:txBody>
+          <a:bodyPr wrap="square">
+            <a:spAutoFit/>
+          </a:bodyPr>
+          <a:lstStyle/>
+          <a:p>
+            <a:pPr>
+              <a:spcAft>
+                <a:spcPts val="1260"/>
+              </a:spcAft>
+            </a:pPr>
+            <a:r>
+              <a:rPr sz="2800" b="1">
+                <a:solidFill>
+                  <a:srgbClr val="C2531C"/>
+                </a:solidFill>
+                <a:latin typeface="Nunito Sans"/>
+              </a:rPr>
+              <a:t>Falacia</a:t>
+            </a:r>
+          </a:p>
+        </p:txBody>
+      </p:sp>
+      <p:sp>
+        <p:nvSpPr>
+          <p:cNvPr id="6" name="TextBox 5"/>
+          <p:cNvSpPr txBox="1"/>
+          <p:nvPr/>
+        </p:nvSpPr>
+        <p:spPr>
+          <a:xfrm>
+            <a:off x="840000" y="2400000"/>
+            <a:ext cx="4906000" cy="3500000"/>
+          </a:xfrm>
+          <a:prstGeom prst="rect">
+            <a:avLst/>
+          </a:prstGeom>
+          <a:noFill/>
+        </p:spPr>
+        <p:txBody>
+          <a:bodyPr wrap="square">
+            <a:spAutoFit/>
+          </a:bodyPr>
+          <a:lstStyle/>
+          <a:p>
+            <a:pPr>
+              <a:spcAft>
+                <a:spcPts val="1170"/>
+              </a:spcAft>
+            </a:pPr>
+            <a:r>
+              <a:rPr sz="2600" b="1">
+                <a:solidFill>
+                  <a:srgbClr val="E8793A"/>
+                </a:solidFill>
+                <a:latin typeface="Nunito Sans"/>
+              </a:rPr>
+              <a:t>• </a:t>
+            </a:r>
+            <a:r>
+              <a:rPr sz="2600" b="0">
+                <a:solidFill>
+                  <a:srgbClr val="1F2A44"/>
+                </a:solidFill>
+                <a:latin typeface="Nunito Sans"/>
+              </a:rPr>
+              <a:t>Uno o dos casos → «todos»</a:t>
+            </a:r>
+          </a:p>
+          <a:p>
+            <a:pPr>
+              <a:spcAft>
+                <a:spcPts val="1170"/>
+              </a:spcAft>
+            </a:pPr>
+            <a:r>
+              <a:rPr sz="2600" b="1">
+                <a:solidFill>
+                  <a:srgbClr val="E8793A"/>
+                </a:solidFill>
+                <a:latin typeface="Nunito Sans"/>
+              </a:rPr>
+              <a:t>• </a:t>
+            </a:r>
+            <a:r>
+              <a:rPr sz="2600" b="0">
+                <a:solidFill>
+                  <a:srgbClr val="1F2A44"/>
+                </a:solidFill>
+                <a:latin typeface="Nunito Sans"/>
+              </a:rPr>
+              <a:t>Esconder las opciones del medio</a:t>
+            </a:r>
+          </a:p>
+          <a:p>
+            <a:pPr>
+              <a:spcAft>
+                <a:spcPts val="1170"/>
+              </a:spcAft>
+            </a:pPr>
+            <a:r>
+              <a:rPr sz="2600" b="1">
+                <a:solidFill>
+                  <a:srgbClr val="E8793A"/>
+                </a:solidFill>
+                <a:latin typeface="Nunito Sans"/>
+              </a:rPr>
+              <a:t>• </a:t>
+            </a:r>
+            <a:r>
+              <a:rPr sz="2600" b="0">
+                <a:solidFill>
+                  <a:srgbClr val="1F2A44"/>
+                </a:solidFill>
+                <a:latin typeface="Nunito Sans"/>
+              </a:rPr>
+              <a:t>Cadena de pasos sin razones</a:t>
+            </a:r>
+          </a:p>
+          <a:p>
+            <a:pPr>
+              <a:spcAft>
+                <a:spcPts val="1170"/>
+              </a:spcAft>
+            </a:pPr>
+            <a:r>
+              <a:rPr sz="2600" b="1">
+                <a:solidFill>
+                  <a:srgbClr val="E8793A"/>
+                </a:solidFill>
+                <a:latin typeface="Nunito Sans"/>
+              </a:rPr>
+              <a:t>• </a:t>
+            </a:r>
+            <a:r>
+              <a:rPr sz="2600" b="0">
+                <a:solidFill>
+                  <a:srgbClr val="1F2A44"/>
+                </a:solidFill>
+                <a:latin typeface="Nunito Sans"/>
+              </a:rPr>
+              <a:t>«Después de» → «por culpa de»</a:t>
+            </a:r>
+          </a:p>
+        </p:txBody>
+      </p:sp>
+      <p:sp>
+        <p:nvSpPr>
+          <p:cNvPr id="7" name="Rectangle 6"/>
+          <p:cNvSpPr/>
+          <p:nvPr/>
+        </p:nvSpPr>
+        <p:spPr>
+          <a:xfrm>
+            <a:off x="6246000" y="1650000"/>
+            <a:ext cx="5306000" cy="4400000"/>
+          </a:xfrm>
+          <a:prstGeom prst="rect">
+            <a:avLst/>
+          </a:prstGeom>
+          <a:solidFill>
+            <a:srgbClr val="EAF0F7"/>
+          </a:solidFill>
+          <a:ln>
+            <a:noFill/>
+          </a:ln>
+        </p:spPr>
+        <p:style>
+          <a:lnRef idx="1">
+            <a:schemeClr val="accent1"/>
+          </a:lnRef>
+          <a:fillRef idx="3">
+            <a:schemeClr val="accent1"/>
+          </a:fillRef>
+          <a:effectRef idx="2">
+            <a:schemeClr val="accent1"/>
+          </a:effectRef>
+          <a:fontRef idx="minor">
+            <a:schemeClr val="lt1"/>
+          </a:fontRef>
+        </p:style>
+        <p:txBody>
+          <a:bodyPr rtlCol="0" anchor="ctr"/>
+          <a:lstStyle/>
+          <a:p>
+            <a:pPr algn="ctr"/>
+          </a:p>
+        </p:txBody>
+      </p:sp>
+      <p:sp>
+        <p:nvSpPr>
+          <p:cNvPr id="8" name="TextBox 7"/>
+          <p:cNvSpPr txBox="1"/>
+          <p:nvPr/>
+        </p:nvSpPr>
+        <p:spPr>
+          <a:xfrm>
+            <a:off x="6446000" y="1750000"/>
+            <a:ext cx="4906000" cy="600000"/>
+          </a:xfrm>
+          <a:prstGeom prst="rect">
+            <a:avLst/>
+          </a:prstGeom>
+          <a:noFill/>
+        </p:spPr>
+        <p:txBody>
+          <a:bodyPr wrap="square">
+            <a:spAutoFit/>
+          </a:bodyPr>
+          <a:lstStyle/>
+          <a:p>
+            <a:pPr>
+              <a:spcAft>
+                <a:spcPts val="1260"/>
+              </a:spcAft>
+            </a:pPr>
+            <a:r>
+              <a:rPr sz="2800" b="1">
+                <a:solidFill>
+                  <a:srgbClr val="2F6FB5"/>
+                </a:solidFill>
+                <a:latin typeface="Nunito Sans"/>
+              </a:rPr>
+              <a:t>Legítimo</a:t>
+            </a:r>
+          </a:p>
+        </p:txBody>
+      </p:sp>
+      <p:sp>
+        <p:nvSpPr>
+          <p:cNvPr id="9" name="TextBox 8"/>
+          <p:cNvSpPr txBox="1"/>
+          <p:nvPr/>
+        </p:nvSpPr>
+        <p:spPr>
+          <a:xfrm>
+            <a:off x="6446000" y="2400000"/>
+            <a:ext cx="4906000" cy="3500000"/>
+          </a:xfrm>
+          <a:prstGeom prst="rect">
+            <a:avLst/>
+          </a:prstGeom>
+          <a:noFill/>
+        </p:spPr>
+        <p:txBody>
+          <a:bodyPr wrap="square">
+            <a:spAutoFit/>
+          </a:bodyPr>
+          <a:lstStyle/>
+          <a:p>
+            <a:pPr>
+              <a:spcAft>
+                <a:spcPts val="1170"/>
+              </a:spcAft>
+            </a:pPr>
+            <a:r>
+              <a:rPr sz="2600" b="1">
+                <a:solidFill>
+                  <a:srgbClr val="E8793A"/>
+                </a:solidFill>
+                <a:latin typeface="Nunito Sans"/>
+              </a:rPr>
+              <a:t>• </a:t>
+            </a:r>
+            <a:r>
+              <a:rPr sz="2600" b="0">
+                <a:solidFill>
+                  <a:srgbClr val="1F2A44"/>
+                </a:solidFill>
+                <a:latin typeface="Nunito Sans"/>
+              </a:rPr>
+              <a:t>Muchos casos variados → «la mayoría»</a:t>
+            </a:r>
+          </a:p>
+          <a:p>
+            <a:pPr>
+              <a:spcAft>
+                <a:spcPts val="1170"/>
+              </a:spcAft>
+            </a:pPr>
+            <a:r>
+              <a:rPr sz="2600" b="1">
+                <a:solidFill>
+                  <a:srgbClr val="E8793A"/>
+                </a:solidFill>
+                <a:latin typeface="Nunito Sans"/>
+              </a:rPr>
+              <a:t>• </a:t>
+            </a:r>
+            <a:r>
+              <a:rPr sz="2600" b="0">
+                <a:solidFill>
+                  <a:srgbClr val="1F2A44"/>
+                </a:solidFill>
+                <a:latin typeface="Nunito Sans"/>
+              </a:rPr>
+              <a:t>Dos opciones que de verdad son las únicas</a:t>
+            </a:r>
+          </a:p>
+          <a:p>
+            <a:pPr>
+              <a:spcAft>
+                <a:spcPts val="1170"/>
+              </a:spcAft>
+            </a:pPr>
+            <a:r>
+              <a:rPr sz="2600" b="1">
+                <a:solidFill>
+                  <a:srgbClr val="E8793A"/>
+                </a:solidFill>
+                <a:latin typeface="Nunito Sans"/>
+              </a:rPr>
+              <a:t>• </a:t>
+            </a:r>
+            <a:r>
+              <a:rPr sz="2600" b="0">
+                <a:solidFill>
+                  <a:srgbClr val="1F2A44"/>
+                </a:solidFill>
+                <a:latin typeface="Nunito Sans"/>
+              </a:rPr>
+              <a:t>Consecuencias con razones en cada paso</a:t>
+            </a:r>
+          </a:p>
+          <a:p>
+            <a:pPr>
+              <a:spcAft>
+                <a:spcPts val="1170"/>
+              </a:spcAft>
+            </a:pPr>
+            <a:r>
+              <a:rPr sz="2600" b="1">
+                <a:solidFill>
+                  <a:srgbClr val="E8793A"/>
+                </a:solidFill>
+                <a:latin typeface="Nunito Sans"/>
+              </a:rPr>
+              <a:t>• </a:t>
+            </a:r>
+            <a:r>
+              <a:rPr sz="2600" b="0">
+                <a:solidFill>
+                  <a:srgbClr val="1F2A44"/>
+                </a:solidFill>
+                <a:latin typeface="Nunito Sans"/>
+              </a:rPr>
+              <a:t>Causa comprobada varias veces y explicada</a:t>
+            </a:r>
+          </a:p>
+        </p:txBody>
+      </p:sp>
     </p:spTree>
   </p:cSld>
   <p:clrMapOvr>
